--- a/slides/3-4_opioids/3-4_opioids.pptx
+++ b/slides/3-4_opioids/3-4_opioids.pptx
@@ -2181,7 +2181,7 @@
           </a:xfrm>
           <a:prstGeom prst="roundRect">
             <a:avLst>
-              <a:gd name="adj" fmla="val 15625"/>
+              <a:gd name="adj" fmla="val 7813"/>
             </a:avLst>
           </a:prstGeom>
           <a:solidFill>
@@ -2190,14 +2190,14 @@
           <a:ln/>
         </p:spPr>
         <p:txBody>
-          <a:bodyPr wrap="square" lIns="0" tIns="0" rIns="0" bIns="0" rtlCol="0" anchor="ctr"/>
+          <a:bodyPr wrap="none" lIns="0" tIns="0" rIns="0" bIns="0" rtlCol="0" anchor="ctr"/>
           <a:lstStyle/>
           <a:p>
             <a:pPr algn="ctr" indent="0" marL="0">
               <a:buNone/>
             </a:pPr>
             <a:r>
-              <a:rPr lang="ja-JP" altLang="en-US" sz="1100" b="1" dirty="0">
+              <a:rPr lang="ja-JP" altLang="en-US" sz="1050" b="1" dirty="0">
                 <a:solidFill>
                   <a:srgbClr val="FFFFFF"/>
                 </a:solidFill>
@@ -2207,7 +2207,7 @@
               </a:rPr>
               <a:t>共通</a:t>
             </a:r>
-            <a:endParaRPr lang="ja-JP" sz="1100" dirty="0"/>
+            <a:endParaRPr lang="ja-JP" sz="1050" dirty="0"/>
           </a:p>
         </p:txBody>
       </p:sp>
@@ -2224,7 +2224,7 @@
           </a:xfrm>
           <a:prstGeom prst="roundRect">
             <a:avLst>
-              <a:gd name="adj" fmla="val 15625"/>
+              <a:gd name="adj" fmla="val 7813"/>
             </a:avLst>
           </a:prstGeom>
           <a:solidFill>
@@ -2233,14 +2233,14 @@
           <a:ln/>
         </p:spPr>
         <p:txBody>
-          <a:bodyPr wrap="square" lIns="0" tIns="0" rIns="0" bIns="0" rtlCol="0" anchor="ctr"/>
+          <a:bodyPr wrap="none" lIns="0" tIns="0" rIns="0" bIns="0" rtlCol="0" anchor="ctr"/>
           <a:lstStyle/>
           <a:p>
             <a:pPr algn="ctr" indent="0" marL="0">
               <a:buNone/>
             </a:pPr>
             <a:r>
-              <a:rPr lang="ja-JP" altLang="en-US" sz="1100" dirty="0">
+              <a:rPr lang="ja-JP" altLang="en-US" sz="1050" dirty="0">
                 <a:solidFill>
                   <a:srgbClr val="404040"/>
                 </a:solidFill>
@@ -2250,14 +2250,14 @@
               </a:rPr>
               <a:t>フェンタ</a:t>
             </a:r>
-            <a:endParaRPr lang="ja-JP" sz="1100" dirty="0"/>
+            <a:endParaRPr lang="ja-JP" sz="1050" dirty="0"/>
           </a:p>
           <a:p>
             <a:pPr algn="ctr" indent="0" marL="0">
               <a:buNone/>
             </a:pPr>
             <a:r>
-              <a:rPr lang="ja-JP" altLang="en-US" sz="1100" dirty="0">
+              <a:rPr lang="ja-JP" altLang="en-US" sz="1050" dirty="0">
                 <a:solidFill>
                   <a:srgbClr val="404040"/>
                 </a:solidFill>
@@ -2267,7 +2267,7 @@
               </a:rPr>
               <a:t>ニル</a:t>
             </a:r>
-            <a:endParaRPr lang="ja-JP" sz="1100" dirty="0"/>
+            <a:endParaRPr lang="ja-JP" sz="1050" dirty="0"/>
           </a:p>
         </p:txBody>
       </p:sp>
@@ -2284,7 +2284,7 @@
           </a:xfrm>
           <a:prstGeom prst="roundRect">
             <a:avLst>
-              <a:gd name="adj" fmla="val 15625"/>
+              <a:gd name="adj" fmla="val 7813"/>
             </a:avLst>
           </a:prstGeom>
           <a:solidFill>
@@ -2293,14 +2293,14 @@
           <a:ln/>
         </p:spPr>
         <p:txBody>
-          <a:bodyPr wrap="square" lIns="0" tIns="0" rIns="0" bIns="0" rtlCol="0" anchor="ctr"/>
+          <a:bodyPr wrap="none" lIns="0" tIns="0" rIns="0" bIns="0" rtlCol="0" anchor="ctr"/>
           <a:lstStyle/>
           <a:p>
             <a:pPr algn="ctr" indent="0" marL="0">
               <a:buNone/>
             </a:pPr>
             <a:r>
-              <a:rPr lang="ja-JP" altLang="en-US" sz="1100" dirty="0">
+              <a:rPr lang="ja-JP" altLang="en-US" sz="1050" dirty="0">
                 <a:solidFill>
                   <a:srgbClr val="404040"/>
                 </a:solidFill>
@@ -2310,14 +2310,14 @@
               </a:rPr>
               <a:t>レミフェ</a:t>
             </a:r>
-            <a:endParaRPr lang="ja-JP" sz="1100" dirty="0"/>
+            <a:endParaRPr lang="ja-JP" sz="1050" dirty="0"/>
           </a:p>
           <a:p>
             <a:pPr algn="ctr" indent="0" marL="0">
               <a:buNone/>
             </a:pPr>
             <a:r>
-              <a:rPr lang="ja-JP" altLang="en-US" sz="1100" dirty="0">
+              <a:rPr lang="ja-JP" altLang="en-US" sz="1050" dirty="0">
                 <a:solidFill>
                   <a:srgbClr val="404040"/>
                 </a:solidFill>
@@ -2327,7 +2327,7 @@
               </a:rPr>
               <a:t>ンタニル</a:t>
             </a:r>
-            <a:endParaRPr lang="ja-JP" sz="1100" dirty="0"/>
+            <a:endParaRPr lang="ja-JP" sz="1050" dirty="0"/>
           </a:p>
         </p:txBody>
       </p:sp>
@@ -2344,7 +2344,7 @@
           </a:xfrm>
           <a:prstGeom prst="roundRect">
             <a:avLst>
-              <a:gd name="adj" fmla="val 15625"/>
+              <a:gd name="adj" fmla="val 7813"/>
             </a:avLst>
           </a:prstGeom>
           <a:solidFill>
@@ -2353,14 +2353,14 @@
           <a:ln/>
         </p:spPr>
         <p:txBody>
-          <a:bodyPr wrap="square" lIns="0" tIns="0" rIns="0" bIns="0" rtlCol="0" anchor="ctr"/>
+          <a:bodyPr wrap="none" lIns="0" tIns="0" rIns="0" bIns="0" rtlCol="0" anchor="ctr"/>
           <a:lstStyle/>
           <a:p>
             <a:pPr algn="ctr" indent="0" marL="0">
               <a:buNone/>
             </a:pPr>
             <a:r>
-              <a:rPr lang="ja-JP" altLang="en-US" sz="1100" dirty="0">
+              <a:rPr lang="ja-JP" altLang="en-US" sz="1050" dirty="0">
                 <a:solidFill>
                   <a:srgbClr val="404040"/>
                 </a:solidFill>
@@ -2370,7 +2370,7 @@
               </a:rPr>
               <a:t>モルヒネ</a:t>
             </a:r>
-            <a:endParaRPr lang="ja-JP" sz="1100" dirty="0"/>
+            <a:endParaRPr lang="ja-JP" sz="1050" dirty="0"/>
           </a:p>
         </p:txBody>
       </p:sp>
@@ -2387,7 +2387,7 @@
           </a:xfrm>
           <a:prstGeom prst="roundRect">
             <a:avLst>
-              <a:gd name="adj" fmla="val 15625"/>
+              <a:gd name="adj" fmla="val 7813"/>
             </a:avLst>
           </a:prstGeom>
           <a:solidFill>
@@ -2396,14 +2396,14 @@
           <a:ln/>
         </p:spPr>
         <p:txBody>
-          <a:bodyPr wrap="square" lIns="0" tIns="0" rIns="0" bIns="0" rtlCol="0" anchor="ctr"/>
+          <a:bodyPr wrap="none" lIns="0" tIns="0" rIns="0" bIns="0" rtlCol="0" anchor="ctr"/>
           <a:lstStyle/>
           <a:p>
             <a:pPr algn="ctr" indent="0" marL="0">
               <a:buNone/>
             </a:pPr>
             <a:r>
-              <a:rPr lang="ja-JP" altLang="en-US" sz="1100" dirty="0">
+              <a:rPr lang="ja-JP" altLang="en-US" sz="1050" dirty="0">
                 <a:solidFill>
                   <a:srgbClr val="404040"/>
                 </a:solidFill>
@@ -2413,7 +2413,7 @@
               </a:rPr>
               <a:t>安全</a:t>
             </a:r>
-            <a:endParaRPr lang="ja-JP" sz="1100" dirty="0"/>
+            <a:endParaRPr lang="ja-JP" sz="1050" dirty="0"/>
           </a:p>
         </p:txBody>
       </p:sp>
@@ -3105,7 +3105,7 @@
           </a:xfrm>
           <a:prstGeom prst="roundRect">
             <a:avLst>
-              <a:gd name="adj" fmla="val 15625"/>
+              <a:gd name="adj" fmla="val 7813"/>
             </a:avLst>
           </a:prstGeom>
           <a:solidFill>
@@ -3114,14 +3114,14 @@
           <a:ln/>
         </p:spPr>
         <p:txBody>
-          <a:bodyPr wrap="square" lIns="0" tIns="0" rIns="0" bIns="0" rtlCol="0" anchor="ctr"/>
+          <a:bodyPr wrap="none" lIns="0" tIns="0" rIns="0" bIns="0" rtlCol="0" anchor="ctr"/>
           <a:lstStyle/>
           <a:p>
             <a:pPr algn="ctr" indent="0" marL="0">
               <a:buNone/>
             </a:pPr>
             <a:r>
-              <a:rPr lang="ja-JP" altLang="en-US" sz="1100" dirty="0">
+              <a:rPr lang="ja-JP" altLang="en-US" sz="1050" dirty="0">
                 <a:solidFill>
                   <a:srgbClr val="404040"/>
                 </a:solidFill>
@@ -3131,7 +3131,7 @@
               </a:rPr>
               <a:t>共通</a:t>
             </a:r>
-            <a:endParaRPr lang="ja-JP" sz="1100" dirty="0"/>
+            <a:endParaRPr lang="ja-JP" sz="1050" dirty="0"/>
           </a:p>
         </p:txBody>
       </p:sp>
@@ -3148,7 +3148,7 @@
           </a:xfrm>
           <a:prstGeom prst="roundRect">
             <a:avLst>
-              <a:gd name="adj" fmla="val 15625"/>
+              <a:gd name="adj" fmla="val 7813"/>
             </a:avLst>
           </a:prstGeom>
           <a:solidFill>
@@ -3157,14 +3157,14 @@
           <a:ln/>
         </p:spPr>
         <p:txBody>
-          <a:bodyPr wrap="square" lIns="0" tIns="0" rIns="0" bIns="0" rtlCol="0" anchor="ctr"/>
+          <a:bodyPr wrap="none" lIns="0" tIns="0" rIns="0" bIns="0" rtlCol="0" anchor="ctr"/>
           <a:lstStyle/>
           <a:p>
             <a:pPr algn="ctr" indent="0" marL="0">
               <a:buNone/>
             </a:pPr>
             <a:r>
-              <a:rPr lang="ja-JP" altLang="en-US" sz="1100" b="1" dirty="0">
+              <a:rPr lang="ja-JP" altLang="en-US" sz="1050" b="1" dirty="0">
                 <a:solidFill>
                   <a:srgbClr val="FFFFFF"/>
                 </a:solidFill>
@@ -3174,14 +3174,14 @@
               </a:rPr>
               <a:t>フェンタ</a:t>
             </a:r>
-            <a:endParaRPr lang="ja-JP" sz="1100" dirty="0"/>
+            <a:endParaRPr lang="ja-JP" sz="1050" dirty="0"/>
           </a:p>
           <a:p>
             <a:pPr algn="ctr" indent="0" marL="0">
               <a:buNone/>
             </a:pPr>
             <a:r>
-              <a:rPr lang="ja-JP" altLang="en-US" sz="1100" b="1" dirty="0">
+              <a:rPr lang="ja-JP" altLang="en-US" sz="1050" b="1" dirty="0">
                 <a:solidFill>
                   <a:srgbClr val="FFFFFF"/>
                 </a:solidFill>
@@ -3191,7 +3191,7 @@
               </a:rPr>
               <a:t>ニル</a:t>
             </a:r>
-            <a:endParaRPr lang="ja-JP" sz="1100" dirty="0"/>
+            <a:endParaRPr lang="ja-JP" sz="1050" dirty="0"/>
           </a:p>
         </p:txBody>
       </p:sp>
@@ -3208,7 +3208,7 @@
           </a:xfrm>
           <a:prstGeom prst="roundRect">
             <a:avLst>
-              <a:gd name="adj" fmla="val 15625"/>
+              <a:gd name="adj" fmla="val 7813"/>
             </a:avLst>
           </a:prstGeom>
           <a:solidFill>
@@ -3217,14 +3217,14 @@
           <a:ln/>
         </p:spPr>
         <p:txBody>
-          <a:bodyPr wrap="square" lIns="0" tIns="0" rIns="0" bIns="0" rtlCol="0" anchor="ctr"/>
+          <a:bodyPr wrap="none" lIns="0" tIns="0" rIns="0" bIns="0" rtlCol="0" anchor="ctr"/>
           <a:lstStyle/>
           <a:p>
             <a:pPr algn="ctr" indent="0" marL="0">
               <a:buNone/>
             </a:pPr>
             <a:r>
-              <a:rPr lang="ja-JP" altLang="en-US" sz="1100" dirty="0">
+              <a:rPr lang="ja-JP" altLang="en-US" sz="1050" dirty="0">
                 <a:solidFill>
                   <a:srgbClr val="404040"/>
                 </a:solidFill>
@@ -3234,14 +3234,14 @@
               </a:rPr>
               <a:t>レミフェ</a:t>
             </a:r>
-            <a:endParaRPr lang="ja-JP" sz="1100" dirty="0"/>
+            <a:endParaRPr lang="ja-JP" sz="1050" dirty="0"/>
           </a:p>
           <a:p>
             <a:pPr algn="ctr" indent="0" marL="0">
               <a:buNone/>
             </a:pPr>
             <a:r>
-              <a:rPr lang="ja-JP" altLang="en-US" sz="1100" dirty="0">
+              <a:rPr lang="ja-JP" altLang="en-US" sz="1050" dirty="0">
                 <a:solidFill>
                   <a:srgbClr val="404040"/>
                 </a:solidFill>
@@ -3251,7 +3251,7 @@
               </a:rPr>
               <a:t>ンタニル</a:t>
             </a:r>
-            <a:endParaRPr lang="ja-JP" sz="1100" dirty="0"/>
+            <a:endParaRPr lang="ja-JP" sz="1050" dirty="0"/>
           </a:p>
         </p:txBody>
       </p:sp>
@@ -3268,7 +3268,7 @@
           </a:xfrm>
           <a:prstGeom prst="roundRect">
             <a:avLst>
-              <a:gd name="adj" fmla="val 15625"/>
+              <a:gd name="adj" fmla="val 7813"/>
             </a:avLst>
           </a:prstGeom>
           <a:solidFill>
@@ -3277,14 +3277,14 @@
           <a:ln/>
         </p:spPr>
         <p:txBody>
-          <a:bodyPr wrap="square" lIns="0" tIns="0" rIns="0" bIns="0" rtlCol="0" anchor="ctr"/>
+          <a:bodyPr wrap="none" lIns="0" tIns="0" rIns="0" bIns="0" rtlCol="0" anchor="ctr"/>
           <a:lstStyle/>
           <a:p>
             <a:pPr algn="ctr" indent="0" marL="0">
               <a:buNone/>
             </a:pPr>
             <a:r>
-              <a:rPr lang="ja-JP" altLang="en-US" sz="1100" dirty="0">
+              <a:rPr lang="ja-JP" altLang="en-US" sz="1050" dirty="0">
                 <a:solidFill>
                   <a:srgbClr val="404040"/>
                 </a:solidFill>
@@ -3294,7 +3294,7 @@
               </a:rPr>
               <a:t>モルヒネ</a:t>
             </a:r>
-            <a:endParaRPr lang="ja-JP" sz="1100" dirty="0"/>
+            <a:endParaRPr lang="ja-JP" sz="1050" dirty="0"/>
           </a:p>
         </p:txBody>
       </p:sp>
@@ -3311,7 +3311,7 @@
           </a:xfrm>
           <a:prstGeom prst="roundRect">
             <a:avLst>
-              <a:gd name="adj" fmla="val 15625"/>
+              <a:gd name="adj" fmla="val 7813"/>
             </a:avLst>
           </a:prstGeom>
           <a:solidFill>
@@ -3320,14 +3320,14 @@
           <a:ln/>
         </p:spPr>
         <p:txBody>
-          <a:bodyPr wrap="square" lIns="0" tIns="0" rIns="0" bIns="0" rtlCol="0" anchor="ctr"/>
+          <a:bodyPr wrap="none" lIns="0" tIns="0" rIns="0" bIns="0" rtlCol="0" anchor="ctr"/>
           <a:lstStyle/>
           <a:p>
             <a:pPr algn="ctr" indent="0" marL="0">
               <a:buNone/>
             </a:pPr>
             <a:r>
-              <a:rPr lang="ja-JP" altLang="en-US" sz="1100" dirty="0">
+              <a:rPr lang="ja-JP" altLang="en-US" sz="1050" dirty="0">
                 <a:solidFill>
                   <a:srgbClr val="404040"/>
                 </a:solidFill>
@@ -3337,7 +3337,7 @@
               </a:rPr>
               <a:t>安全</a:t>
             </a:r>
-            <a:endParaRPr lang="ja-JP" sz="1100" dirty="0"/>
+            <a:endParaRPr lang="ja-JP" sz="1050" dirty="0"/>
           </a:p>
         </p:txBody>
       </p:sp>
@@ -4368,7 +4368,7 @@
           </a:xfrm>
           <a:prstGeom prst="roundRect">
             <a:avLst>
-              <a:gd name="adj" fmla="val 15625"/>
+              <a:gd name="adj" fmla="val 7813"/>
             </a:avLst>
           </a:prstGeom>
           <a:solidFill>
@@ -4377,14 +4377,14 @@
           <a:ln/>
         </p:spPr>
         <p:txBody>
-          <a:bodyPr wrap="square" lIns="0" tIns="0" rIns="0" bIns="0" rtlCol="0" anchor="ctr"/>
+          <a:bodyPr wrap="none" lIns="0" tIns="0" rIns="0" bIns="0" rtlCol="0" anchor="ctr"/>
           <a:lstStyle/>
           <a:p>
             <a:pPr algn="ctr" indent="0" marL="0">
               <a:buNone/>
             </a:pPr>
             <a:r>
-              <a:rPr lang="ja-JP" altLang="en-US" sz="1100" dirty="0">
+              <a:rPr lang="ja-JP" altLang="en-US" sz="1050" dirty="0">
                 <a:solidFill>
                   <a:srgbClr val="404040"/>
                 </a:solidFill>
@@ -4394,7 +4394,7 @@
               </a:rPr>
               <a:t>共通</a:t>
             </a:r>
-            <a:endParaRPr lang="ja-JP" sz="1100" dirty="0"/>
+            <a:endParaRPr lang="ja-JP" sz="1050" dirty="0"/>
           </a:p>
         </p:txBody>
       </p:sp>
@@ -4411,7 +4411,7 @@
           </a:xfrm>
           <a:prstGeom prst="roundRect">
             <a:avLst>
-              <a:gd name="adj" fmla="val 15625"/>
+              <a:gd name="adj" fmla="val 7813"/>
             </a:avLst>
           </a:prstGeom>
           <a:solidFill>
@@ -4420,14 +4420,14 @@
           <a:ln/>
         </p:spPr>
         <p:txBody>
-          <a:bodyPr wrap="square" lIns="0" tIns="0" rIns="0" bIns="0" rtlCol="0" anchor="ctr"/>
+          <a:bodyPr wrap="none" lIns="0" tIns="0" rIns="0" bIns="0" rtlCol="0" anchor="ctr"/>
           <a:lstStyle/>
           <a:p>
             <a:pPr algn="ctr" indent="0" marL="0">
               <a:buNone/>
             </a:pPr>
             <a:r>
-              <a:rPr lang="ja-JP" altLang="en-US" sz="1100" dirty="0">
+              <a:rPr lang="ja-JP" altLang="en-US" sz="1050" dirty="0">
                 <a:solidFill>
                   <a:srgbClr val="404040"/>
                 </a:solidFill>
@@ -4437,14 +4437,14 @@
               </a:rPr>
               <a:t>フェンタ</a:t>
             </a:r>
-            <a:endParaRPr lang="ja-JP" sz="1100" dirty="0"/>
+            <a:endParaRPr lang="ja-JP" sz="1050" dirty="0"/>
           </a:p>
           <a:p>
             <a:pPr algn="ctr" indent="0" marL="0">
               <a:buNone/>
             </a:pPr>
             <a:r>
-              <a:rPr lang="ja-JP" altLang="en-US" sz="1100" dirty="0">
+              <a:rPr lang="ja-JP" altLang="en-US" sz="1050" dirty="0">
                 <a:solidFill>
                   <a:srgbClr val="404040"/>
                 </a:solidFill>
@@ -4454,7 +4454,7 @@
               </a:rPr>
               <a:t>ニル</a:t>
             </a:r>
-            <a:endParaRPr lang="ja-JP" sz="1100" dirty="0"/>
+            <a:endParaRPr lang="ja-JP" sz="1050" dirty="0"/>
           </a:p>
         </p:txBody>
       </p:sp>
@@ -4471,7 +4471,7 @@
           </a:xfrm>
           <a:prstGeom prst="roundRect">
             <a:avLst>
-              <a:gd name="adj" fmla="val 15625"/>
+              <a:gd name="adj" fmla="val 7813"/>
             </a:avLst>
           </a:prstGeom>
           <a:solidFill>
@@ -4480,14 +4480,14 @@
           <a:ln/>
         </p:spPr>
         <p:txBody>
-          <a:bodyPr wrap="square" lIns="0" tIns="0" rIns="0" bIns="0" rtlCol="0" anchor="ctr"/>
+          <a:bodyPr wrap="none" lIns="0" tIns="0" rIns="0" bIns="0" rtlCol="0" anchor="ctr"/>
           <a:lstStyle/>
           <a:p>
             <a:pPr algn="ctr" indent="0" marL="0">
               <a:buNone/>
             </a:pPr>
             <a:r>
-              <a:rPr lang="ja-JP" altLang="en-US" sz="1100" b="1" dirty="0">
+              <a:rPr lang="ja-JP" altLang="en-US" sz="1050" b="1" dirty="0">
                 <a:solidFill>
                   <a:srgbClr val="FFFFFF"/>
                 </a:solidFill>
@@ -4497,14 +4497,14 @@
               </a:rPr>
               <a:t>レミフェ</a:t>
             </a:r>
-            <a:endParaRPr lang="ja-JP" sz="1100" dirty="0"/>
+            <a:endParaRPr lang="ja-JP" sz="1050" dirty="0"/>
           </a:p>
           <a:p>
             <a:pPr algn="ctr" indent="0" marL="0">
               <a:buNone/>
             </a:pPr>
             <a:r>
-              <a:rPr lang="ja-JP" altLang="en-US" sz="1100" b="1" dirty="0">
+              <a:rPr lang="ja-JP" altLang="en-US" sz="1050" b="1" dirty="0">
                 <a:solidFill>
                   <a:srgbClr val="FFFFFF"/>
                 </a:solidFill>
@@ -4514,7 +4514,7 @@
               </a:rPr>
               <a:t>ンタニル</a:t>
             </a:r>
-            <a:endParaRPr lang="ja-JP" sz="1100" dirty="0"/>
+            <a:endParaRPr lang="ja-JP" sz="1050" dirty="0"/>
           </a:p>
         </p:txBody>
       </p:sp>
@@ -4531,7 +4531,7 @@
           </a:xfrm>
           <a:prstGeom prst="roundRect">
             <a:avLst>
-              <a:gd name="adj" fmla="val 15625"/>
+              <a:gd name="adj" fmla="val 7813"/>
             </a:avLst>
           </a:prstGeom>
           <a:solidFill>
@@ -4540,14 +4540,14 @@
           <a:ln/>
         </p:spPr>
         <p:txBody>
-          <a:bodyPr wrap="square" lIns="0" tIns="0" rIns="0" bIns="0" rtlCol="0" anchor="ctr"/>
+          <a:bodyPr wrap="none" lIns="0" tIns="0" rIns="0" bIns="0" rtlCol="0" anchor="ctr"/>
           <a:lstStyle/>
           <a:p>
             <a:pPr algn="ctr" indent="0" marL="0">
               <a:buNone/>
             </a:pPr>
             <a:r>
-              <a:rPr lang="ja-JP" altLang="en-US" sz="1100" dirty="0">
+              <a:rPr lang="ja-JP" altLang="en-US" sz="1050" dirty="0">
                 <a:solidFill>
                   <a:srgbClr val="404040"/>
                 </a:solidFill>
@@ -4557,7 +4557,7 @@
               </a:rPr>
               <a:t>モルヒネ</a:t>
             </a:r>
-            <a:endParaRPr lang="ja-JP" sz="1100" dirty="0"/>
+            <a:endParaRPr lang="ja-JP" sz="1050" dirty="0"/>
           </a:p>
         </p:txBody>
       </p:sp>
@@ -4574,7 +4574,7 @@
           </a:xfrm>
           <a:prstGeom prst="roundRect">
             <a:avLst>
-              <a:gd name="adj" fmla="val 15625"/>
+              <a:gd name="adj" fmla="val 7813"/>
             </a:avLst>
           </a:prstGeom>
           <a:solidFill>
@@ -4583,14 +4583,14 @@
           <a:ln/>
         </p:spPr>
         <p:txBody>
-          <a:bodyPr wrap="square" lIns="0" tIns="0" rIns="0" bIns="0" rtlCol="0" anchor="ctr"/>
+          <a:bodyPr wrap="none" lIns="0" tIns="0" rIns="0" bIns="0" rtlCol="0" anchor="ctr"/>
           <a:lstStyle/>
           <a:p>
             <a:pPr algn="ctr" indent="0" marL="0">
               <a:buNone/>
             </a:pPr>
             <a:r>
-              <a:rPr lang="ja-JP" altLang="en-US" sz="1100" dirty="0">
+              <a:rPr lang="ja-JP" altLang="en-US" sz="1050" dirty="0">
                 <a:solidFill>
                   <a:srgbClr val="404040"/>
                 </a:solidFill>
@@ -4600,7 +4600,7 @@
               </a:rPr>
               <a:t>安全</a:t>
             </a:r>
-            <a:endParaRPr lang="ja-JP" sz="1100" dirty="0"/>
+            <a:endParaRPr lang="ja-JP" sz="1050" dirty="0"/>
           </a:p>
         </p:txBody>
       </p:sp>
@@ -5742,7 +5742,7 @@
           </a:xfrm>
           <a:prstGeom prst="roundRect">
             <a:avLst>
-              <a:gd name="adj" fmla="val 15625"/>
+              <a:gd name="adj" fmla="val 7813"/>
             </a:avLst>
           </a:prstGeom>
           <a:solidFill>
@@ -5751,14 +5751,14 @@
           <a:ln/>
         </p:spPr>
         <p:txBody>
-          <a:bodyPr wrap="square" lIns="0" tIns="0" rIns="0" bIns="0" rtlCol="0" anchor="ctr"/>
+          <a:bodyPr wrap="none" lIns="0" tIns="0" rIns="0" bIns="0" rtlCol="0" anchor="ctr"/>
           <a:lstStyle/>
           <a:p>
             <a:pPr algn="ctr" indent="0" marL="0">
               <a:buNone/>
             </a:pPr>
             <a:r>
-              <a:rPr lang="ja-JP" altLang="en-US" sz="1100" dirty="0">
+              <a:rPr lang="ja-JP" altLang="en-US" sz="1050" dirty="0">
                 <a:solidFill>
                   <a:srgbClr val="404040"/>
                 </a:solidFill>
@@ -5768,7 +5768,7 @@
               </a:rPr>
               <a:t>共通</a:t>
             </a:r>
-            <a:endParaRPr lang="ja-JP" sz="1100" dirty="0"/>
+            <a:endParaRPr lang="ja-JP" sz="1050" dirty="0"/>
           </a:p>
         </p:txBody>
       </p:sp>
@@ -5785,7 +5785,7 @@
           </a:xfrm>
           <a:prstGeom prst="roundRect">
             <a:avLst>
-              <a:gd name="adj" fmla="val 15625"/>
+              <a:gd name="adj" fmla="val 7813"/>
             </a:avLst>
           </a:prstGeom>
           <a:solidFill>
@@ -5794,14 +5794,14 @@
           <a:ln/>
         </p:spPr>
         <p:txBody>
-          <a:bodyPr wrap="square" lIns="0" tIns="0" rIns="0" bIns="0" rtlCol="0" anchor="ctr"/>
+          <a:bodyPr wrap="none" lIns="0" tIns="0" rIns="0" bIns="0" rtlCol="0" anchor="ctr"/>
           <a:lstStyle/>
           <a:p>
             <a:pPr algn="ctr" indent="0" marL="0">
               <a:buNone/>
             </a:pPr>
             <a:r>
-              <a:rPr lang="ja-JP" altLang="en-US" sz="1100" dirty="0">
+              <a:rPr lang="ja-JP" altLang="en-US" sz="1050" dirty="0">
                 <a:solidFill>
                   <a:srgbClr val="404040"/>
                 </a:solidFill>
@@ -5811,14 +5811,14 @@
               </a:rPr>
               <a:t>フェンタ</a:t>
             </a:r>
-            <a:endParaRPr lang="ja-JP" sz="1100" dirty="0"/>
+            <a:endParaRPr lang="ja-JP" sz="1050" dirty="0"/>
           </a:p>
           <a:p>
             <a:pPr algn="ctr" indent="0" marL="0">
               <a:buNone/>
             </a:pPr>
             <a:r>
-              <a:rPr lang="ja-JP" altLang="en-US" sz="1100" dirty="0">
+              <a:rPr lang="ja-JP" altLang="en-US" sz="1050" dirty="0">
                 <a:solidFill>
                   <a:srgbClr val="404040"/>
                 </a:solidFill>
@@ -5828,7 +5828,7 @@
               </a:rPr>
               <a:t>ニル</a:t>
             </a:r>
-            <a:endParaRPr lang="ja-JP" sz="1100" dirty="0"/>
+            <a:endParaRPr lang="ja-JP" sz="1050" dirty="0"/>
           </a:p>
         </p:txBody>
       </p:sp>
@@ -5845,7 +5845,7 @@
           </a:xfrm>
           <a:prstGeom prst="roundRect">
             <a:avLst>
-              <a:gd name="adj" fmla="val 15625"/>
+              <a:gd name="adj" fmla="val 7813"/>
             </a:avLst>
           </a:prstGeom>
           <a:solidFill>
@@ -5854,14 +5854,14 @@
           <a:ln/>
         </p:spPr>
         <p:txBody>
-          <a:bodyPr wrap="square" lIns="0" tIns="0" rIns="0" bIns="0" rtlCol="0" anchor="ctr"/>
+          <a:bodyPr wrap="none" lIns="0" tIns="0" rIns="0" bIns="0" rtlCol="0" anchor="ctr"/>
           <a:lstStyle/>
           <a:p>
             <a:pPr algn="ctr" indent="0" marL="0">
               <a:buNone/>
             </a:pPr>
             <a:r>
-              <a:rPr lang="ja-JP" altLang="en-US" sz="1100" dirty="0">
+              <a:rPr lang="ja-JP" altLang="en-US" sz="1050" dirty="0">
                 <a:solidFill>
                   <a:srgbClr val="404040"/>
                 </a:solidFill>
@@ -5871,14 +5871,14 @@
               </a:rPr>
               <a:t>レミフェ</a:t>
             </a:r>
-            <a:endParaRPr lang="ja-JP" sz="1100" dirty="0"/>
+            <a:endParaRPr lang="ja-JP" sz="1050" dirty="0"/>
           </a:p>
           <a:p>
             <a:pPr algn="ctr" indent="0" marL="0">
               <a:buNone/>
             </a:pPr>
             <a:r>
-              <a:rPr lang="ja-JP" altLang="en-US" sz="1100" dirty="0">
+              <a:rPr lang="ja-JP" altLang="en-US" sz="1050" dirty="0">
                 <a:solidFill>
                   <a:srgbClr val="404040"/>
                 </a:solidFill>
@@ -5888,7 +5888,7 @@
               </a:rPr>
               <a:t>ンタニル</a:t>
             </a:r>
-            <a:endParaRPr lang="ja-JP" sz="1100" dirty="0"/>
+            <a:endParaRPr lang="ja-JP" sz="1050" dirty="0"/>
           </a:p>
         </p:txBody>
       </p:sp>
@@ -5905,7 +5905,7 @@
           </a:xfrm>
           <a:prstGeom prst="roundRect">
             <a:avLst>
-              <a:gd name="adj" fmla="val 15625"/>
+              <a:gd name="adj" fmla="val 7813"/>
             </a:avLst>
           </a:prstGeom>
           <a:solidFill>
@@ -5914,14 +5914,14 @@
           <a:ln/>
         </p:spPr>
         <p:txBody>
-          <a:bodyPr wrap="square" lIns="0" tIns="0" rIns="0" bIns="0" rtlCol="0" anchor="ctr"/>
+          <a:bodyPr wrap="none" lIns="0" tIns="0" rIns="0" bIns="0" rtlCol="0" anchor="ctr"/>
           <a:lstStyle/>
           <a:p>
             <a:pPr algn="ctr" indent="0" marL="0">
               <a:buNone/>
             </a:pPr>
             <a:r>
-              <a:rPr lang="ja-JP" altLang="en-US" sz="1100" b="1" dirty="0">
+              <a:rPr lang="ja-JP" altLang="en-US" sz="1050" b="1" dirty="0">
                 <a:solidFill>
                   <a:srgbClr val="FFFFFF"/>
                 </a:solidFill>
@@ -5931,7 +5931,7 @@
               </a:rPr>
               <a:t>モルヒネ</a:t>
             </a:r>
-            <a:endParaRPr lang="ja-JP" sz="1100" dirty="0"/>
+            <a:endParaRPr lang="ja-JP" sz="1050" dirty="0"/>
           </a:p>
         </p:txBody>
       </p:sp>
@@ -5948,7 +5948,7 @@
           </a:xfrm>
           <a:prstGeom prst="roundRect">
             <a:avLst>
-              <a:gd name="adj" fmla="val 15625"/>
+              <a:gd name="adj" fmla="val 7813"/>
             </a:avLst>
           </a:prstGeom>
           <a:solidFill>
@@ -5957,14 +5957,14 @@
           <a:ln/>
         </p:spPr>
         <p:txBody>
-          <a:bodyPr wrap="square" lIns="0" tIns="0" rIns="0" bIns="0" rtlCol="0" anchor="ctr"/>
+          <a:bodyPr wrap="none" lIns="0" tIns="0" rIns="0" bIns="0" rtlCol="0" anchor="ctr"/>
           <a:lstStyle/>
           <a:p>
             <a:pPr algn="ctr" indent="0" marL="0">
               <a:buNone/>
             </a:pPr>
             <a:r>
-              <a:rPr lang="ja-JP" altLang="en-US" sz="1100" dirty="0">
+              <a:rPr lang="ja-JP" altLang="en-US" sz="1050" dirty="0">
                 <a:solidFill>
                   <a:srgbClr val="404040"/>
                 </a:solidFill>
@@ -5974,7 +5974,7 @@
               </a:rPr>
               <a:t>安全</a:t>
             </a:r>
-            <a:endParaRPr lang="ja-JP" sz="1100" dirty="0"/>
+            <a:endParaRPr lang="ja-JP" sz="1050" dirty="0"/>
           </a:p>
         </p:txBody>
       </p:sp>
@@ -7033,7 +7033,7 @@
           </a:xfrm>
           <a:prstGeom prst="roundRect">
             <a:avLst>
-              <a:gd name="adj" fmla="val 15625"/>
+              <a:gd name="adj" fmla="val 7813"/>
             </a:avLst>
           </a:prstGeom>
           <a:solidFill>
@@ -7042,14 +7042,14 @@
           <a:ln/>
         </p:spPr>
         <p:txBody>
-          <a:bodyPr wrap="square" lIns="0" tIns="0" rIns="0" bIns="0" rtlCol="0" anchor="ctr"/>
+          <a:bodyPr wrap="none" lIns="0" tIns="0" rIns="0" bIns="0" rtlCol="0" anchor="ctr"/>
           <a:lstStyle/>
           <a:p>
             <a:pPr algn="ctr" indent="0" marL="0">
               <a:buNone/>
             </a:pPr>
             <a:r>
-              <a:rPr lang="ja-JP" altLang="en-US" sz="1100" dirty="0">
+              <a:rPr lang="ja-JP" altLang="en-US" sz="1050" dirty="0">
                 <a:solidFill>
                   <a:srgbClr val="404040"/>
                 </a:solidFill>
@@ -7059,7 +7059,7 @@
               </a:rPr>
               <a:t>共通</a:t>
             </a:r>
-            <a:endParaRPr lang="ja-JP" sz="1100" dirty="0"/>
+            <a:endParaRPr lang="ja-JP" sz="1050" dirty="0"/>
           </a:p>
         </p:txBody>
       </p:sp>
@@ -7076,7 +7076,7 @@
           </a:xfrm>
           <a:prstGeom prst="roundRect">
             <a:avLst>
-              <a:gd name="adj" fmla="val 15625"/>
+              <a:gd name="adj" fmla="val 7813"/>
             </a:avLst>
           </a:prstGeom>
           <a:solidFill>
@@ -7085,14 +7085,14 @@
           <a:ln/>
         </p:spPr>
         <p:txBody>
-          <a:bodyPr wrap="square" lIns="0" tIns="0" rIns="0" bIns="0" rtlCol="0" anchor="ctr"/>
+          <a:bodyPr wrap="none" lIns="0" tIns="0" rIns="0" bIns="0" rtlCol="0" anchor="ctr"/>
           <a:lstStyle/>
           <a:p>
             <a:pPr algn="ctr" indent="0" marL="0">
               <a:buNone/>
             </a:pPr>
             <a:r>
-              <a:rPr lang="ja-JP" altLang="en-US" sz="1100" dirty="0">
+              <a:rPr lang="ja-JP" altLang="en-US" sz="1050" dirty="0">
                 <a:solidFill>
                   <a:srgbClr val="404040"/>
                 </a:solidFill>
@@ -7102,14 +7102,14 @@
               </a:rPr>
               <a:t>フェンタ</a:t>
             </a:r>
-            <a:endParaRPr lang="ja-JP" sz="1100" dirty="0"/>
+            <a:endParaRPr lang="ja-JP" sz="1050" dirty="0"/>
           </a:p>
           <a:p>
             <a:pPr algn="ctr" indent="0" marL="0">
               <a:buNone/>
             </a:pPr>
             <a:r>
-              <a:rPr lang="ja-JP" altLang="en-US" sz="1100" dirty="0">
+              <a:rPr lang="ja-JP" altLang="en-US" sz="1050" dirty="0">
                 <a:solidFill>
                   <a:srgbClr val="404040"/>
                 </a:solidFill>
@@ -7119,7 +7119,7 @@
               </a:rPr>
               <a:t>ニル</a:t>
             </a:r>
-            <a:endParaRPr lang="ja-JP" sz="1100" dirty="0"/>
+            <a:endParaRPr lang="ja-JP" sz="1050" dirty="0"/>
           </a:p>
         </p:txBody>
       </p:sp>
@@ -7136,7 +7136,7 @@
           </a:xfrm>
           <a:prstGeom prst="roundRect">
             <a:avLst>
-              <a:gd name="adj" fmla="val 15625"/>
+              <a:gd name="adj" fmla="val 7813"/>
             </a:avLst>
           </a:prstGeom>
           <a:solidFill>
@@ -7145,14 +7145,14 @@
           <a:ln/>
         </p:spPr>
         <p:txBody>
-          <a:bodyPr wrap="square" lIns="0" tIns="0" rIns="0" bIns="0" rtlCol="0" anchor="ctr"/>
+          <a:bodyPr wrap="none" lIns="0" tIns="0" rIns="0" bIns="0" rtlCol="0" anchor="ctr"/>
           <a:lstStyle/>
           <a:p>
             <a:pPr algn="ctr" indent="0" marL="0">
               <a:buNone/>
             </a:pPr>
             <a:r>
-              <a:rPr lang="ja-JP" altLang="en-US" sz="1100" dirty="0">
+              <a:rPr lang="ja-JP" altLang="en-US" sz="1050" dirty="0">
                 <a:solidFill>
                   <a:srgbClr val="404040"/>
                 </a:solidFill>
@@ -7162,14 +7162,14 @@
               </a:rPr>
               <a:t>レミフェ</a:t>
             </a:r>
-            <a:endParaRPr lang="ja-JP" sz="1100" dirty="0"/>
+            <a:endParaRPr lang="ja-JP" sz="1050" dirty="0"/>
           </a:p>
           <a:p>
             <a:pPr algn="ctr" indent="0" marL="0">
               <a:buNone/>
             </a:pPr>
             <a:r>
-              <a:rPr lang="ja-JP" altLang="en-US" sz="1100" dirty="0">
+              <a:rPr lang="ja-JP" altLang="en-US" sz="1050" dirty="0">
                 <a:solidFill>
                   <a:srgbClr val="404040"/>
                 </a:solidFill>
@@ -7179,7 +7179,7 @@
               </a:rPr>
               <a:t>ンタニル</a:t>
             </a:r>
-            <a:endParaRPr lang="ja-JP" sz="1100" dirty="0"/>
+            <a:endParaRPr lang="ja-JP" sz="1050" dirty="0"/>
           </a:p>
         </p:txBody>
       </p:sp>
@@ -7196,7 +7196,7 @@
           </a:xfrm>
           <a:prstGeom prst="roundRect">
             <a:avLst>
-              <a:gd name="adj" fmla="val 15625"/>
+              <a:gd name="adj" fmla="val 7813"/>
             </a:avLst>
           </a:prstGeom>
           <a:solidFill>
@@ -7205,14 +7205,14 @@
           <a:ln/>
         </p:spPr>
         <p:txBody>
-          <a:bodyPr wrap="square" lIns="0" tIns="0" rIns="0" bIns="0" rtlCol="0" anchor="ctr"/>
+          <a:bodyPr wrap="none" lIns="0" tIns="0" rIns="0" bIns="0" rtlCol="0" anchor="ctr"/>
           <a:lstStyle/>
           <a:p>
             <a:pPr algn="ctr" indent="0" marL="0">
               <a:buNone/>
             </a:pPr>
             <a:r>
-              <a:rPr lang="ja-JP" altLang="en-US" sz="1100" dirty="0">
+              <a:rPr lang="ja-JP" altLang="en-US" sz="1050" dirty="0">
                 <a:solidFill>
                   <a:srgbClr val="404040"/>
                 </a:solidFill>
@@ -7222,7 +7222,7 @@
               </a:rPr>
               <a:t>モルヒネ</a:t>
             </a:r>
-            <a:endParaRPr lang="ja-JP" sz="1100" dirty="0"/>
+            <a:endParaRPr lang="ja-JP" sz="1050" dirty="0"/>
           </a:p>
         </p:txBody>
       </p:sp>
@@ -7239,7 +7239,7 @@
           </a:xfrm>
           <a:prstGeom prst="roundRect">
             <a:avLst>
-              <a:gd name="adj" fmla="val 15625"/>
+              <a:gd name="adj" fmla="val 7813"/>
             </a:avLst>
           </a:prstGeom>
           <a:solidFill>
@@ -7248,14 +7248,14 @@
           <a:ln/>
         </p:spPr>
         <p:txBody>
-          <a:bodyPr wrap="square" lIns="0" tIns="0" rIns="0" bIns="0" rtlCol="0" anchor="ctr"/>
+          <a:bodyPr wrap="none" lIns="0" tIns="0" rIns="0" bIns="0" rtlCol="0" anchor="ctr"/>
           <a:lstStyle/>
           <a:p>
             <a:pPr algn="ctr" indent="0" marL="0">
               <a:buNone/>
             </a:pPr>
             <a:r>
-              <a:rPr lang="ja-JP" altLang="en-US" sz="1100" b="1" dirty="0">
+              <a:rPr lang="ja-JP" altLang="en-US" sz="1050" b="1" dirty="0">
                 <a:solidFill>
                   <a:srgbClr val="FFFFFF"/>
                 </a:solidFill>
@@ -7265,7 +7265,7 @@
               </a:rPr>
               <a:t>安全</a:t>
             </a:r>
-            <a:endParaRPr lang="ja-JP" sz="1100" dirty="0"/>
+            <a:endParaRPr lang="ja-JP" sz="1050" dirty="0"/>
           </a:p>
         </p:txBody>
       </p:sp>
@@ -8472,7 +8472,7 @@
           </a:xfrm>
           <a:prstGeom prst="roundRect">
             <a:avLst>
-              <a:gd name="adj" fmla="val 15625"/>
+              <a:gd name="adj" fmla="val 7813"/>
             </a:avLst>
           </a:prstGeom>
           <a:solidFill>
@@ -8481,14 +8481,14 @@
           <a:ln/>
         </p:spPr>
         <p:txBody>
-          <a:bodyPr wrap="square" lIns="0" tIns="0" rIns="0" bIns="0" rtlCol="0" anchor="ctr"/>
+          <a:bodyPr wrap="none" lIns="0" tIns="0" rIns="0" bIns="0" rtlCol="0" anchor="ctr"/>
           <a:lstStyle/>
           <a:p>
             <a:pPr algn="ctr" indent="0" marL="0">
               <a:buNone/>
             </a:pPr>
             <a:r>
-              <a:rPr lang="ja-JP" altLang="en-US" sz="1100" dirty="0">
+              <a:rPr lang="ja-JP" altLang="en-US" sz="1050" dirty="0">
                 <a:solidFill>
                   <a:srgbClr val="404040"/>
                 </a:solidFill>
@@ -8498,7 +8498,7 @@
               </a:rPr>
               <a:t>共通</a:t>
             </a:r>
-            <a:endParaRPr lang="ja-JP" sz="1100" dirty="0"/>
+            <a:endParaRPr lang="ja-JP" sz="1050" dirty="0"/>
           </a:p>
         </p:txBody>
       </p:sp>
@@ -8515,7 +8515,7 @@
           </a:xfrm>
           <a:prstGeom prst="roundRect">
             <a:avLst>
-              <a:gd name="adj" fmla="val 15625"/>
+              <a:gd name="adj" fmla="val 7813"/>
             </a:avLst>
           </a:prstGeom>
           <a:solidFill>
@@ -8524,14 +8524,14 @@
           <a:ln/>
         </p:spPr>
         <p:txBody>
-          <a:bodyPr wrap="square" lIns="0" tIns="0" rIns="0" bIns="0" rtlCol="0" anchor="ctr"/>
+          <a:bodyPr wrap="none" lIns="0" tIns="0" rIns="0" bIns="0" rtlCol="0" anchor="ctr"/>
           <a:lstStyle/>
           <a:p>
             <a:pPr algn="ctr" indent="0" marL="0">
               <a:buNone/>
             </a:pPr>
             <a:r>
-              <a:rPr lang="ja-JP" altLang="en-US" sz="1100" dirty="0">
+              <a:rPr lang="ja-JP" altLang="en-US" sz="1050" dirty="0">
                 <a:solidFill>
                   <a:srgbClr val="404040"/>
                 </a:solidFill>
@@ -8541,14 +8541,14 @@
               </a:rPr>
               <a:t>フェンタ</a:t>
             </a:r>
-            <a:endParaRPr lang="ja-JP" sz="1100" dirty="0"/>
+            <a:endParaRPr lang="ja-JP" sz="1050" dirty="0"/>
           </a:p>
           <a:p>
             <a:pPr algn="ctr" indent="0" marL="0">
               <a:buNone/>
             </a:pPr>
             <a:r>
-              <a:rPr lang="ja-JP" altLang="en-US" sz="1100" dirty="0">
+              <a:rPr lang="ja-JP" altLang="en-US" sz="1050" dirty="0">
                 <a:solidFill>
                   <a:srgbClr val="404040"/>
                 </a:solidFill>
@@ -8558,7 +8558,7 @@
               </a:rPr>
               <a:t>ニル</a:t>
             </a:r>
-            <a:endParaRPr lang="ja-JP" sz="1100" dirty="0"/>
+            <a:endParaRPr lang="ja-JP" sz="1050" dirty="0"/>
           </a:p>
         </p:txBody>
       </p:sp>
@@ -8575,7 +8575,7 @@
           </a:xfrm>
           <a:prstGeom prst="roundRect">
             <a:avLst>
-              <a:gd name="adj" fmla="val 15625"/>
+              <a:gd name="adj" fmla="val 7813"/>
             </a:avLst>
           </a:prstGeom>
           <a:solidFill>
@@ -8584,14 +8584,14 @@
           <a:ln/>
         </p:spPr>
         <p:txBody>
-          <a:bodyPr wrap="square" lIns="0" tIns="0" rIns="0" bIns="0" rtlCol="0" anchor="ctr"/>
+          <a:bodyPr wrap="none" lIns="0" tIns="0" rIns="0" bIns="0" rtlCol="0" anchor="ctr"/>
           <a:lstStyle/>
           <a:p>
             <a:pPr algn="ctr" indent="0" marL="0">
               <a:buNone/>
             </a:pPr>
             <a:r>
-              <a:rPr lang="ja-JP" altLang="en-US" sz="1100" dirty="0">
+              <a:rPr lang="ja-JP" altLang="en-US" sz="1050" dirty="0">
                 <a:solidFill>
                   <a:srgbClr val="404040"/>
                 </a:solidFill>
@@ -8601,14 +8601,14 @@
               </a:rPr>
               <a:t>レミフェ</a:t>
             </a:r>
-            <a:endParaRPr lang="ja-JP" sz="1100" dirty="0"/>
+            <a:endParaRPr lang="ja-JP" sz="1050" dirty="0"/>
           </a:p>
           <a:p>
             <a:pPr algn="ctr" indent="0" marL="0">
               <a:buNone/>
             </a:pPr>
             <a:r>
-              <a:rPr lang="ja-JP" altLang="en-US" sz="1100" dirty="0">
+              <a:rPr lang="ja-JP" altLang="en-US" sz="1050" dirty="0">
                 <a:solidFill>
                   <a:srgbClr val="404040"/>
                 </a:solidFill>
@@ -8618,7 +8618,7 @@
               </a:rPr>
               <a:t>ンタニル</a:t>
             </a:r>
-            <a:endParaRPr lang="ja-JP" sz="1100" dirty="0"/>
+            <a:endParaRPr lang="ja-JP" sz="1050" dirty="0"/>
           </a:p>
         </p:txBody>
       </p:sp>
@@ -8635,7 +8635,7 @@
           </a:xfrm>
           <a:prstGeom prst="roundRect">
             <a:avLst>
-              <a:gd name="adj" fmla="val 15625"/>
+              <a:gd name="adj" fmla="val 7813"/>
             </a:avLst>
           </a:prstGeom>
           <a:solidFill>
@@ -8644,14 +8644,14 @@
           <a:ln/>
         </p:spPr>
         <p:txBody>
-          <a:bodyPr wrap="square" lIns="0" tIns="0" rIns="0" bIns="0" rtlCol="0" anchor="ctr"/>
+          <a:bodyPr wrap="none" lIns="0" tIns="0" rIns="0" bIns="0" rtlCol="0" anchor="ctr"/>
           <a:lstStyle/>
           <a:p>
             <a:pPr algn="ctr" indent="0" marL="0">
               <a:buNone/>
             </a:pPr>
             <a:r>
-              <a:rPr lang="ja-JP" altLang="en-US" sz="1100" dirty="0">
+              <a:rPr lang="ja-JP" altLang="en-US" sz="1050" dirty="0">
                 <a:solidFill>
                   <a:srgbClr val="404040"/>
                 </a:solidFill>
@@ -8661,7 +8661,7 @@
               </a:rPr>
               <a:t>モルヒネ</a:t>
             </a:r>
-            <a:endParaRPr lang="ja-JP" sz="1100" dirty="0"/>
+            <a:endParaRPr lang="ja-JP" sz="1050" dirty="0"/>
           </a:p>
         </p:txBody>
       </p:sp>
@@ -8678,7 +8678,7 @@
           </a:xfrm>
           <a:prstGeom prst="roundRect">
             <a:avLst>
-              <a:gd name="adj" fmla="val 15625"/>
+              <a:gd name="adj" fmla="val 7813"/>
             </a:avLst>
           </a:prstGeom>
           <a:solidFill>
@@ -8687,14 +8687,14 @@
           <a:ln/>
         </p:spPr>
         <p:txBody>
-          <a:bodyPr wrap="square" lIns="0" tIns="0" rIns="0" bIns="0" rtlCol="0" anchor="ctr"/>
+          <a:bodyPr wrap="none" lIns="0" tIns="0" rIns="0" bIns="0" rtlCol="0" anchor="ctr"/>
           <a:lstStyle/>
           <a:p>
             <a:pPr algn="ctr" indent="0" marL="0">
               <a:buNone/>
             </a:pPr>
             <a:r>
-              <a:rPr lang="ja-JP" altLang="en-US" sz="1100" b="1" dirty="0">
+              <a:rPr lang="ja-JP" altLang="en-US" sz="1050" b="1" dirty="0">
                 <a:solidFill>
                   <a:srgbClr val="FFFFFF"/>
                 </a:solidFill>
@@ -8704,7 +8704,7 @@
               </a:rPr>
               <a:t>安全</a:t>
             </a:r>
-            <a:endParaRPr lang="ja-JP" sz="1100" dirty="0"/>
+            <a:endParaRPr lang="ja-JP" sz="1050" dirty="0"/>
           </a:p>
         </p:txBody>
       </p:sp>
@@ -9097,7 +9097,7 @@
           </a:xfrm>
           <a:prstGeom prst="roundRect">
             <a:avLst>
-              <a:gd name="adj" fmla="val 15625"/>
+              <a:gd name="adj" fmla="val 7813"/>
             </a:avLst>
           </a:prstGeom>
           <a:solidFill>
@@ -9106,14 +9106,14 @@
           <a:ln/>
         </p:spPr>
         <p:txBody>
-          <a:bodyPr wrap="square" lIns="0" tIns="0" rIns="0" bIns="0" rtlCol="0" anchor="ctr"/>
+          <a:bodyPr wrap="none" lIns="0" tIns="0" rIns="0" bIns="0" rtlCol="0" anchor="ctr"/>
           <a:lstStyle/>
           <a:p>
             <a:pPr algn="ctr" indent="0" marL="0">
               <a:buNone/>
             </a:pPr>
             <a:r>
-              <a:rPr lang="ja-JP" altLang="en-US" sz="1100" dirty="0">
+              <a:rPr lang="ja-JP" altLang="en-US" sz="1050" dirty="0">
                 <a:solidFill>
                   <a:srgbClr val="404040"/>
                 </a:solidFill>
@@ -9123,7 +9123,7 @@
               </a:rPr>
               <a:t>共通</a:t>
             </a:r>
-            <a:endParaRPr lang="ja-JP" sz="1100" dirty="0"/>
+            <a:endParaRPr lang="ja-JP" sz="1050" dirty="0"/>
           </a:p>
         </p:txBody>
       </p:sp>
@@ -9140,7 +9140,7 @@
           </a:xfrm>
           <a:prstGeom prst="roundRect">
             <a:avLst>
-              <a:gd name="adj" fmla="val 15625"/>
+              <a:gd name="adj" fmla="val 7813"/>
             </a:avLst>
           </a:prstGeom>
           <a:solidFill>
@@ -9149,14 +9149,14 @@
           <a:ln/>
         </p:spPr>
         <p:txBody>
-          <a:bodyPr wrap="square" lIns="0" tIns="0" rIns="0" bIns="0" rtlCol="0" anchor="ctr"/>
+          <a:bodyPr wrap="none" lIns="0" tIns="0" rIns="0" bIns="0" rtlCol="0" anchor="ctr"/>
           <a:lstStyle/>
           <a:p>
             <a:pPr algn="ctr" indent="0" marL="0">
               <a:buNone/>
             </a:pPr>
             <a:r>
-              <a:rPr lang="ja-JP" altLang="en-US" sz="1100" dirty="0">
+              <a:rPr lang="ja-JP" altLang="en-US" sz="1050" dirty="0">
                 <a:solidFill>
                   <a:srgbClr val="404040"/>
                 </a:solidFill>
@@ -9166,14 +9166,14 @@
               </a:rPr>
               <a:t>フェンタ</a:t>
             </a:r>
-            <a:endParaRPr lang="ja-JP" sz="1100" dirty="0"/>
+            <a:endParaRPr lang="ja-JP" sz="1050" dirty="0"/>
           </a:p>
           <a:p>
             <a:pPr algn="ctr" indent="0" marL="0">
               <a:buNone/>
             </a:pPr>
             <a:r>
-              <a:rPr lang="ja-JP" altLang="en-US" sz="1100" dirty="0">
+              <a:rPr lang="ja-JP" altLang="en-US" sz="1050" dirty="0">
                 <a:solidFill>
                   <a:srgbClr val="404040"/>
                 </a:solidFill>
@@ -9183,7 +9183,7 @@
               </a:rPr>
               <a:t>ニル</a:t>
             </a:r>
-            <a:endParaRPr lang="ja-JP" sz="1100" dirty="0"/>
+            <a:endParaRPr lang="ja-JP" sz="1050" dirty="0"/>
           </a:p>
         </p:txBody>
       </p:sp>
@@ -9200,7 +9200,7 @@
           </a:xfrm>
           <a:prstGeom prst="roundRect">
             <a:avLst>
-              <a:gd name="adj" fmla="val 15625"/>
+              <a:gd name="adj" fmla="val 7813"/>
             </a:avLst>
           </a:prstGeom>
           <a:solidFill>
@@ -9209,14 +9209,14 @@
           <a:ln/>
         </p:spPr>
         <p:txBody>
-          <a:bodyPr wrap="square" lIns="0" tIns="0" rIns="0" bIns="0" rtlCol="0" anchor="ctr"/>
+          <a:bodyPr wrap="none" lIns="0" tIns="0" rIns="0" bIns="0" rtlCol="0" anchor="ctr"/>
           <a:lstStyle/>
           <a:p>
             <a:pPr algn="ctr" indent="0" marL="0">
               <a:buNone/>
             </a:pPr>
             <a:r>
-              <a:rPr lang="ja-JP" altLang="en-US" sz="1100" dirty="0">
+              <a:rPr lang="ja-JP" altLang="en-US" sz="1050" dirty="0">
                 <a:solidFill>
                   <a:srgbClr val="404040"/>
                 </a:solidFill>
@@ -9226,14 +9226,14 @@
               </a:rPr>
               <a:t>レミフェ</a:t>
             </a:r>
-            <a:endParaRPr lang="ja-JP" sz="1100" dirty="0"/>
+            <a:endParaRPr lang="ja-JP" sz="1050" dirty="0"/>
           </a:p>
           <a:p>
             <a:pPr algn="ctr" indent="0" marL="0">
               <a:buNone/>
             </a:pPr>
             <a:r>
-              <a:rPr lang="ja-JP" altLang="en-US" sz="1100" dirty="0">
+              <a:rPr lang="ja-JP" altLang="en-US" sz="1050" dirty="0">
                 <a:solidFill>
                   <a:srgbClr val="404040"/>
                 </a:solidFill>
@@ -9243,7 +9243,7 @@
               </a:rPr>
               <a:t>ンタニル</a:t>
             </a:r>
-            <a:endParaRPr lang="ja-JP" sz="1100" dirty="0"/>
+            <a:endParaRPr lang="ja-JP" sz="1050" dirty="0"/>
           </a:p>
         </p:txBody>
       </p:sp>
@@ -9260,7 +9260,7 @@
           </a:xfrm>
           <a:prstGeom prst="roundRect">
             <a:avLst>
-              <a:gd name="adj" fmla="val 15625"/>
+              <a:gd name="adj" fmla="val 7813"/>
             </a:avLst>
           </a:prstGeom>
           <a:solidFill>
@@ -9269,14 +9269,14 @@
           <a:ln/>
         </p:spPr>
         <p:txBody>
-          <a:bodyPr wrap="square" lIns="0" tIns="0" rIns="0" bIns="0" rtlCol="0" anchor="ctr"/>
+          <a:bodyPr wrap="none" lIns="0" tIns="0" rIns="0" bIns="0" rtlCol="0" anchor="ctr"/>
           <a:lstStyle/>
           <a:p>
             <a:pPr algn="ctr" indent="0" marL="0">
               <a:buNone/>
             </a:pPr>
             <a:r>
-              <a:rPr lang="ja-JP" altLang="en-US" sz="1100" dirty="0">
+              <a:rPr lang="ja-JP" altLang="en-US" sz="1050" dirty="0">
                 <a:solidFill>
                   <a:srgbClr val="404040"/>
                 </a:solidFill>
@@ -9286,7 +9286,7 @@
               </a:rPr>
               <a:t>モルヒネ</a:t>
             </a:r>
-            <a:endParaRPr lang="ja-JP" sz="1100" dirty="0"/>
+            <a:endParaRPr lang="ja-JP" sz="1050" dirty="0"/>
           </a:p>
         </p:txBody>
       </p:sp>
@@ -9303,7 +9303,7 @@
           </a:xfrm>
           <a:prstGeom prst="roundRect">
             <a:avLst>
-              <a:gd name="adj" fmla="val 15625"/>
+              <a:gd name="adj" fmla="val 7813"/>
             </a:avLst>
           </a:prstGeom>
           <a:solidFill>
@@ -9312,14 +9312,14 @@
           <a:ln/>
         </p:spPr>
         <p:txBody>
-          <a:bodyPr wrap="square" lIns="0" tIns="0" rIns="0" bIns="0" rtlCol="0" anchor="ctr"/>
+          <a:bodyPr wrap="none" lIns="0" tIns="0" rIns="0" bIns="0" rtlCol="0" anchor="ctr"/>
           <a:lstStyle/>
           <a:p>
             <a:pPr algn="ctr" indent="0" marL="0">
               <a:buNone/>
             </a:pPr>
             <a:r>
-              <a:rPr lang="ja-JP" altLang="en-US" sz="1100" b="1" dirty="0">
+              <a:rPr lang="ja-JP" altLang="en-US" sz="1050" b="1" dirty="0">
                 <a:solidFill>
                   <a:srgbClr val="FFFFFF"/>
                 </a:solidFill>
@@ -9329,7 +9329,7 @@
               </a:rPr>
               <a:t>安全</a:t>
             </a:r>
-            <a:endParaRPr lang="ja-JP" sz="1100" dirty="0"/>
+            <a:endParaRPr lang="ja-JP" sz="1050" dirty="0"/>
           </a:p>
         </p:txBody>
       </p:sp>
@@ -9647,7 +9647,7 @@
           </a:xfrm>
           <a:prstGeom prst="roundRect">
             <a:avLst>
-              <a:gd name="adj" fmla="val 15625"/>
+              <a:gd name="adj" fmla="val 7813"/>
             </a:avLst>
           </a:prstGeom>
           <a:solidFill>
@@ -9656,14 +9656,14 @@
           <a:ln/>
         </p:spPr>
         <p:txBody>
-          <a:bodyPr wrap="square" lIns="0" tIns="0" rIns="0" bIns="0" rtlCol="0" anchor="ctr"/>
+          <a:bodyPr wrap="none" lIns="0" tIns="0" rIns="0" bIns="0" rtlCol="0" anchor="ctr"/>
           <a:lstStyle/>
           <a:p>
             <a:pPr algn="ctr" indent="0" marL="0">
               <a:buNone/>
             </a:pPr>
             <a:r>
-              <a:rPr lang="ja-JP" altLang="en-US" sz="1100" dirty="0">
+              <a:rPr lang="ja-JP" altLang="en-US" sz="1050" dirty="0">
                 <a:solidFill>
                   <a:srgbClr val="404040"/>
                 </a:solidFill>
@@ -9673,7 +9673,7 @@
               </a:rPr>
               <a:t>共通</a:t>
             </a:r>
-            <a:endParaRPr lang="ja-JP" sz="1100" dirty="0"/>
+            <a:endParaRPr lang="ja-JP" sz="1050" dirty="0"/>
           </a:p>
         </p:txBody>
       </p:sp>
@@ -9690,7 +9690,7 @@
           </a:xfrm>
           <a:prstGeom prst="roundRect">
             <a:avLst>
-              <a:gd name="adj" fmla="val 15625"/>
+              <a:gd name="adj" fmla="val 7813"/>
             </a:avLst>
           </a:prstGeom>
           <a:solidFill>
@@ -9699,14 +9699,14 @@
           <a:ln/>
         </p:spPr>
         <p:txBody>
-          <a:bodyPr wrap="square" lIns="0" tIns="0" rIns="0" bIns="0" rtlCol="0" anchor="ctr"/>
+          <a:bodyPr wrap="none" lIns="0" tIns="0" rIns="0" bIns="0" rtlCol="0" anchor="ctr"/>
           <a:lstStyle/>
           <a:p>
             <a:pPr algn="ctr" indent="0" marL="0">
               <a:buNone/>
             </a:pPr>
             <a:r>
-              <a:rPr lang="ja-JP" altLang="en-US" sz="1100" dirty="0">
+              <a:rPr lang="ja-JP" altLang="en-US" sz="1050" dirty="0">
                 <a:solidFill>
                   <a:srgbClr val="404040"/>
                 </a:solidFill>
@@ -9716,14 +9716,14 @@
               </a:rPr>
               <a:t>フェンタ</a:t>
             </a:r>
-            <a:endParaRPr lang="ja-JP" sz="1100" dirty="0"/>
+            <a:endParaRPr lang="ja-JP" sz="1050" dirty="0"/>
           </a:p>
           <a:p>
             <a:pPr algn="ctr" indent="0" marL="0">
               <a:buNone/>
             </a:pPr>
             <a:r>
-              <a:rPr lang="ja-JP" altLang="en-US" sz="1100" dirty="0">
+              <a:rPr lang="ja-JP" altLang="en-US" sz="1050" dirty="0">
                 <a:solidFill>
                   <a:srgbClr val="404040"/>
                 </a:solidFill>
@@ -9733,7 +9733,7 @@
               </a:rPr>
               <a:t>ニル</a:t>
             </a:r>
-            <a:endParaRPr lang="ja-JP" sz="1100" dirty="0"/>
+            <a:endParaRPr lang="ja-JP" sz="1050" dirty="0"/>
           </a:p>
         </p:txBody>
       </p:sp>
@@ -9750,7 +9750,7 @@
           </a:xfrm>
           <a:prstGeom prst="roundRect">
             <a:avLst>
-              <a:gd name="adj" fmla="val 15625"/>
+              <a:gd name="adj" fmla="val 7813"/>
             </a:avLst>
           </a:prstGeom>
           <a:solidFill>
@@ -9759,14 +9759,14 @@
           <a:ln/>
         </p:spPr>
         <p:txBody>
-          <a:bodyPr wrap="square" lIns="0" tIns="0" rIns="0" bIns="0" rtlCol="0" anchor="ctr"/>
+          <a:bodyPr wrap="none" lIns="0" tIns="0" rIns="0" bIns="0" rtlCol="0" anchor="ctr"/>
           <a:lstStyle/>
           <a:p>
             <a:pPr algn="ctr" indent="0" marL="0">
               <a:buNone/>
             </a:pPr>
             <a:r>
-              <a:rPr lang="ja-JP" altLang="en-US" sz="1100" dirty="0">
+              <a:rPr lang="ja-JP" altLang="en-US" sz="1050" dirty="0">
                 <a:solidFill>
                   <a:srgbClr val="404040"/>
                 </a:solidFill>
@@ -9776,14 +9776,14 @@
               </a:rPr>
               <a:t>レミフェ</a:t>
             </a:r>
-            <a:endParaRPr lang="ja-JP" sz="1100" dirty="0"/>
+            <a:endParaRPr lang="ja-JP" sz="1050" dirty="0"/>
           </a:p>
           <a:p>
             <a:pPr algn="ctr" indent="0" marL="0">
               <a:buNone/>
             </a:pPr>
             <a:r>
-              <a:rPr lang="ja-JP" altLang="en-US" sz="1100" dirty="0">
+              <a:rPr lang="ja-JP" altLang="en-US" sz="1050" dirty="0">
                 <a:solidFill>
                   <a:srgbClr val="404040"/>
                 </a:solidFill>
@@ -9793,7 +9793,7 @@
               </a:rPr>
               <a:t>ンタニル</a:t>
             </a:r>
-            <a:endParaRPr lang="ja-JP" sz="1100" dirty="0"/>
+            <a:endParaRPr lang="ja-JP" sz="1050" dirty="0"/>
           </a:p>
         </p:txBody>
       </p:sp>
@@ -9810,7 +9810,7 @@
           </a:xfrm>
           <a:prstGeom prst="roundRect">
             <a:avLst>
-              <a:gd name="adj" fmla="val 15625"/>
+              <a:gd name="adj" fmla="val 7813"/>
             </a:avLst>
           </a:prstGeom>
           <a:solidFill>
@@ -9819,14 +9819,14 @@
           <a:ln/>
         </p:spPr>
         <p:txBody>
-          <a:bodyPr wrap="square" lIns="0" tIns="0" rIns="0" bIns="0" rtlCol="0" anchor="ctr"/>
+          <a:bodyPr wrap="none" lIns="0" tIns="0" rIns="0" bIns="0" rtlCol="0" anchor="ctr"/>
           <a:lstStyle/>
           <a:p>
             <a:pPr algn="ctr" indent="0" marL="0">
               <a:buNone/>
             </a:pPr>
             <a:r>
-              <a:rPr lang="ja-JP" altLang="en-US" sz="1100" dirty="0">
+              <a:rPr lang="ja-JP" altLang="en-US" sz="1050" dirty="0">
                 <a:solidFill>
                   <a:srgbClr val="404040"/>
                 </a:solidFill>
@@ -9836,7 +9836,7 @@
               </a:rPr>
               <a:t>モルヒネ</a:t>
             </a:r>
-            <a:endParaRPr lang="ja-JP" sz="1100" dirty="0"/>
+            <a:endParaRPr lang="ja-JP" sz="1050" dirty="0"/>
           </a:p>
         </p:txBody>
       </p:sp>
@@ -9853,7 +9853,7 @@
           </a:xfrm>
           <a:prstGeom prst="roundRect">
             <a:avLst>
-              <a:gd name="adj" fmla="val 15625"/>
+              <a:gd name="adj" fmla="val 7813"/>
             </a:avLst>
           </a:prstGeom>
           <a:solidFill>
@@ -9862,14 +9862,14 @@
           <a:ln/>
         </p:spPr>
         <p:txBody>
-          <a:bodyPr wrap="square" lIns="0" tIns="0" rIns="0" bIns="0" rtlCol="0" anchor="ctr"/>
+          <a:bodyPr wrap="none" lIns="0" tIns="0" rIns="0" bIns="0" rtlCol="0" anchor="ctr"/>
           <a:lstStyle/>
           <a:p>
             <a:pPr algn="ctr" indent="0" marL="0">
               <a:buNone/>
             </a:pPr>
             <a:r>
-              <a:rPr lang="ja-JP" altLang="en-US" sz="1100" b="1" dirty="0">
+              <a:rPr lang="ja-JP" altLang="en-US" sz="1050" b="1" dirty="0">
                 <a:solidFill>
                   <a:srgbClr val="FFFFFF"/>
                 </a:solidFill>
@@ -9879,7 +9879,7 @@
               </a:rPr>
               <a:t>安全</a:t>
             </a:r>
-            <a:endParaRPr lang="ja-JP" sz="1100" dirty="0"/>
+            <a:endParaRPr lang="ja-JP" sz="1050" dirty="0"/>
           </a:p>
         </p:txBody>
       </p:sp>

--- a/slides/3-4_opioids/3-4_opioids.pptx
+++ b/slides/3-4_opioids/3-4_opioids.pptx
@@ -2856,7 +2856,7 @@
             <a:r>
               <a:rPr lang="ja-JP" altLang="en-US" sz="2400" b="1" dirty="0">
                 <a:solidFill>
-                  <a:srgbClr val="C00000"/>
+                  <a:srgbClr val="262626"/>
                 </a:solidFill>
                 <a:latin typeface="メイリオ" pitchFamily="34" charset="0"/>
                 <a:ea typeface="メイリオ" pitchFamily="34" charset="-122"/>
@@ -2887,7 +2887,7 @@
         </p:nvSpPr>
         <p:spPr>
           <a:xfrm>
-            <a:off x="6368796" y="3316224"/>
+            <a:off x="6368796" y="3468624"/>
             <a:ext cx="5152644" cy="457200"/>
           </a:xfrm>
           <a:prstGeom prst="rect">
@@ -2926,7 +2926,7 @@
         </p:nvSpPr>
         <p:spPr>
           <a:xfrm>
-            <a:off x="6368796" y="3962400"/>
+            <a:off x="6368796" y="4267200"/>
             <a:ext cx="5152644" cy="457200"/>
           </a:xfrm>
           <a:prstGeom prst="rect">
@@ -2965,7 +2965,7 @@
         </p:nvSpPr>
         <p:spPr>
           <a:xfrm>
-            <a:off x="6368796" y="4608576"/>
+            <a:off x="6368796" y="5065776"/>
             <a:ext cx="5152644" cy="457200"/>
           </a:xfrm>
           <a:prstGeom prst="rect">
@@ -3445,11 +3445,11 @@
         <p:spPr>
           <a:xfrm>
             <a:off x="502920" y="1691640"/>
-            <a:ext cx="3686637" cy="4032504"/>
+            <a:ext cx="3581400" cy="4032504"/>
           </a:xfrm>
           <a:prstGeom prst="roundRect">
             <a:avLst>
-              <a:gd name="adj" fmla="val 1984"/>
+              <a:gd name="adj" fmla="val 2043"/>
             </a:avLst>
           </a:prstGeom>
           <a:solidFill>
@@ -3466,8 +3466,8 @@
         </p:nvSpPr>
         <p:spPr>
           <a:xfrm>
-            <a:off x="630936" y="1837944"/>
-            <a:ext cx="3430605" cy="457200"/>
+            <a:off x="594360" y="1783080"/>
+            <a:ext cx="3444240" cy="457200"/>
           </a:xfrm>
           <a:prstGeom prst="rect">
             <a:avLst/>
@@ -3505,8 +3505,8 @@
         </p:nvSpPr>
         <p:spPr>
           <a:xfrm>
-            <a:off x="630936" y="2441448"/>
-            <a:ext cx="3430605" cy="420624"/>
+            <a:off x="594360" y="2331720"/>
+            <a:ext cx="3444240" cy="420624"/>
           </a:xfrm>
           <a:prstGeom prst="rect">
             <a:avLst/>
@@ -3566,8 +3566,8 @@
         </p:nvSpPr>
         <p:spPr>
           <a:xfrm>
-            <a:off x="630936" y="3172968"/>
-            <a:ext cx="3430605" cy="420624"/>
+            <a:off x="594360" y="3063240"/>
+            <a:ext cx="3444240" cy="420624"/>
           </a:xfrm>
           <a:prstGeom prst="rect">
             <a:avLst/>
@@ -3605,8 +3605,8 @@
         </p:nvSpPr>
         <p:spPr>
           <a:xfrm>
-            <a:off x="905256" y="3593592"/>
-            <a:ext cx="3156285" cy="420624"/>
+            <a:off x="868680" y="3483864"/>
+            <a:ext cx="3169920" cy="420624"/>
           </a:xfrm>
           <a:prstGeom prst="rect">
             <a:avLst/>
@@ -3655,8 +3655,8 @@
         </p:nvSpPr>
         <p:spPr>
           <a:xfrm>
-            <a:off x="630936" y="4325112"/>
-            <a:ext cx="3430605" cy="420624"/>
+            <a:off x="594360" y="4215384"/>
+            <a:ext cx="3444240" cy="420624"/>
           </a:xfrm>
           <a:prstGeom prst="rect">
             <a:avLst/>
@@ -3681,28 +3681,6 @@
                 <a:cs typeface="メイリオ" pitchFamily="34" charset="-120"/>
               </a:rPr>
               <a:t>術後：</a:t>
-            </a:r>
-            <a:r>
-              <a:rPr lang="ja-JP" altLang="en-US" sz="2200" b="1" dirty="0">
-                <a:solidFill>
-                  <a:srgbClr val="262626"/>
-                </a:solidFill>
-                <a:latin typeface="メイリオ" pitchFamily="34" charset="0"/>
-                <a:ea typeface="メイリオ" pitchFamily="34" charset="-122"/>
-                <a:cs typeface="メイリオ" pitchFamily="34" charset="-120"/>
-              </a:rPr>
-              <a:t>25〜50 µg</a:t>
-            </a:r>
-            <a:r>
-              <a:rPr lang="ja-JP" altLang="en-US" sz="2200" dirty="0">
-                <a:solidFill>
-                  <a:srgbClr val="262626"/>
-                </a:solidFill>
-                <a:latin typeface="メイリオ" pitchFamily="34" charset="0"/>
-                <a:ea typeface="メイリオ" pitchFamily="34" charset="-122"/>
-                <a:cs typeface="メイリオ" pitchFamily="34" charset="-120"/>
-              </a:rPr>
-              <a:t> ずつ、</a:t>
             </a:r>
             <a:endParaRPr lang="ja-JP" sz="2200" dirty="0"/>
           </a:p>
@@ -3716,8 +3694,8 @@
         </p:nvSpPr>
         <p:spPr>
           <a:xfrm>
-            <a:off x="905256" y="4745736"/>
-            <a:ext cx="3156285" cy="420624"/>
+            <a:off x="868680" y="4636008"/>
+            <a:ext cx="3169920" cy="841248"/>
           </a:xfrm>
           <a:prstGeom prst="rect">
             <a:avLst/>
@@ -3728,6 +3706,34 @@
         <p:txBody>
           <a:bodyPr wrap="square" lIns="0" tIns="0" rIns="0" bIns="0" rtlCol="0" anchor="t"/>
           <a:lstStyle/>
+          <a:p>
+            <a:pPr algn="l" indent="0" marL="0">
+              <a:buNone/>
+            </a:pPr>
+            <a:r>
+              <a:rPr lang="ja-JP" altLang="en-US" sz="2200" b="1" dirty="0">
+                <a:solidFill>
+                  <a:srgbClr val="262626"/>
+                </a:solidFill>
+                <a:latin typeface="メイリオ" pitchFamily="34" charset="0"/>
+                <a:ea typeface="メイリオ" pitchFamily="34" charset="-122"/>
+                <a:cs typeface="メイリオ" pitchFamily="34" charset="-120"/>
+              </a:rPr>
+              <a:t>25〜50 µg</a:t>
+            </a:r>
+            <a:r>
+              <a:rPr lang="ja-JP" altLang="en-US" sz="2200" dirty="0">
+                <a:solidFill>
+                  <a:srgbClr val="262626"/>
+                </a:solidFill>
+                <a:latin typeface="メイリオ" pitchFamily="34" charset="0"/>
+                <a:ea typeface="メイリオ" pitchFamily="34" charset="-122"/>
+                <a:cs typeface="メイリオ" pitchFamily="34" charset="-120"/>
+              </a:rPr>
+              <a:t> ずつ、</a:t>
+            </a:r>
+            <a:endParaRPr lang="ja-JP" sz="2200" dirty="0"/>
+          </a:p>
           <a:p>
             <a:pPr algn="l" indent="0" marL="0">
               <a:buNone/>
@@ -3755,12 +3761,12 @@
         </p:nvSpPr>
         <p:spPr>
           <a:xfrm>
-            <a:off x="4409013" y="1691640"/>
-            <a:ext cx="3699154" cy="4032504"/>
+            <a:off x="4303776" y="1691640"/>
+            <a:ext cx="3581400" cy="4032504"/>
           </a:xfrm>
           <a:prstGeom prst="roundRect">
             <a:avLst>
-              <a:gd name="adj" fmla="val 1978"/>
+              <a:gd name="adj" fmla="val 2043"/>
             </a:avLst>
           </a:prstGeom>
           <a:solidFill>
@@ -3777,8 +3783,8 @@
         </p:nvSpPr>
         <p:spPr>
           <a:xfrm>
-            <a:off x="4537029" y="1837944"/>
-            <a:ext cx="3443122" cy="457200"/>
+            <a:off x="4395216" y="1783080"/>
+            <a:ext cx="3444240" cy="457200"/>
           </a:xfrm>
           <a:prstGeom prst="rect">
             <a:avLst/>
@@ -3816,8 +3822,8 @@
         </p:nvSpPr>
         <p:spPr>
           <a:xfrm>
-            <a:off x="4537029" y="2441448"/>
-            <a:ext cx="3443122" cy="420624"/>
+            <a:off x="4395216" y="2331720"/>
+            <a:ext cx="3444240" cy="420624"/>
           </a:xfrm>
           <a:prstGeom prst="rect">
             <a:avLst/>
@@ -3855,8 +3861,8 @@
         </p:nvSpPr>
         <p:spPr>
           <a:xfrm>
-            <a:off x="4811349" y="2862072"/>
-            <a:ext cx="3168802" cy="420624"/>
+            <a:off x="4669536" y="2752344"/>
+            <a:ext cx="3169920" cy="420624"/>
           </a:xfrm>
           <a:prstGeom prst="rect">
             <a:avLst/>
@@ -3894,8 +3900,8 @@
         </p:nvSpPr>
         <p:spPr>
           <a:xfrm>
-            <a:off x="4537029" y="3593592"/>
-            <a:ext cx="3443122" cy="420624"/>
+            <a:off x="4395216" y="3483864"/>
+            <a:ext cx="3444240" cy="420624"/>
           </a:xfrm>
           <a:prstGeom prst="rect">
             <a:avLst/>
@@ -3933,8 +3939,8 @@
         </p:nvSpPr>
         <p:spPr>
           <a:xfrm>
-            <a:off x="4537029" y="4325112"/>
-            <a:ext cx="3443122" cy="420624"/>
+            <a:off x="4395216" y="4215384"/>
+            <a:ext cx="3444240" cy="420624"/>
           </a:xfrm>
           <a:prstGeom prst="rect">
             <a:avLst/>
@@ -3972,8 +3978,8 @@
         </p:nvSpPr>
         <p:spPr>
           <a:xfrm>
-            <a:off x="4811349" y="4745736"/>
-            <a:ext cx="3168802" cy="420624"/>
+            <a:off x="4669536" y="4636008"/>
+            <a:ext cx="3169920" cy="420624"/>
           </a:xfrm>
           <a:prstGeom prst="rect">
             <a:avLst/>
@@ -4011,12 +4017,12 @@
         </p:nvSpPr>
         <p:spPr>
           <a:xfrm>
-            <a:off x="8327624" y="1691640"/>
-            <a:ext cx="3358408" cy="4032504"/>
+            <a:off x="8104632" y="1691640"/>
+            <a:ext cx="3581400" cy="4032504"/>
           </a:xfrm>
           <a:prstGeom prst="roundRect">
             <a:avLst>
-              <a:gd name="adj" fmla="val 2178"/>
+              <a:gd name="adj" fmla="val 2043"/>
             </a:avLst>
           </a:prstGeom>
           <a:solidFill>
@@ -4033,8 +4039,8 @@
         </p:nvSpPr>
         <p:spPr>
           <a:xfrm>
-            <a:off x="8455640" y="1837944"/>
-            <a:ext cx="3102376" cy="457200"/>
+            <a:off x="8196072" y="1783080"/>
+            <a:ext cx="3444240" cy="457200"/>
           </a:xfrm>
           <a:prstGeom prst="rect">
             <a:avLst/>
@@ -4072,8 +4078,8 @@
         </p:nvSpPr>
         <p:spPr>
           <a:xfrm>
-            <a:off x="8455640" y="2441448"/>
-            <a:ext cx="3102376" cy="420624"/>
+            <a:off x="8196072" y="2331720"/>
+            <a:ext cx="3444240" cy="420624"/>
           </a:xfrm>
           <a:prstGeom prst="rect">
             <a:avLst/>
@@ -4111,8 +4117,8 @@
         </p:nvSpPr>
         <p:spPr>
           <a:xfrm>
-            <a:off x="8729960" y="2862072"/>
-            <a:ext cx="2828056" cy="420624"/>
+            <a:off x="8470392" y="2752344"/>
+            <a:ext cx="3169920" cy="420624"/>
           </a:xfrm>
           <a:prstGeom prst="rect">
             <a:avLst/>
@@ -4150,8 +4156,8 @@
         </p:nvSpPr>
         <p:spPr>
           <a:xfrm>
-            <a:off x="8455640" y="3593592"/>
-            <a:ext cx="3102376" cy="420624"/>
+            <a:off x="8196072" y="3483864"/>
+            <a:ext cx="3444240" cy="420624"/>
           </a:xfrm>
           <a:prstGeom prst="rect">
             <a:avLst/>
@@ -4189,8 +4195,8 @@
         </p:nvSpPr>
         <p:spPr>
           <a:xfrm>
-            <a:off x="8455640" y="4325112"/>
-            <a:ext cx="3102376" cy="420624"/>
+            <a:off x="8196072" y="4215384"/>
+            <a:ext cx="3444240" cy="420624"/>
           </a:xfrm>
           <a:prstGeom prst="rect">
             <a:avLst/>
@@ -4228,8 +4234,8 @@
         </p:nvSpPr>
         <p:spPr>
           <a:xfrm>
-            <a:off x="8729960" y="4745736"/>
-            <a:ext cx="2828056" cy="420624"/>
+            <a:off x="8470392" y="4636008"/>
+            <a:ext cx="3169920" cy="420624"/>
           </a:xfrm>
           <a:prstGeom prst="rect">
             <a:avLst/>
@@ -4708,11 +4714,11 @@
         <p:spPr>
           <a:xfrm>
             <a:off x="502920" y="1691640"/>
-            <a:ext cx="3654288" cy="4032504"/>
+            <a:ext cx="3581400" cy="4032504"/>
           </a:xfrm>
           <a:prstGeom prst="roundRect">
             <a:avLst>
-              <a:gd name="adj" fmla="val 2002"/>
+              <a:gd name="adj" fmla="val 2043"/>
             </a:avLst>
           </a:prstGeom>
           <a:solidFill>
@@ -4729,8 +4735,8 @@
         </p:nvSpPr>
         <p:spPr>
           <a:xfrm>
-            <a:off x="630936" y="1837944"/>
-            <a:ext cx="3398256" cy="457200"/>
+            <a:off x="594360" y="1783080"/>
+            <a:ext cx="3444240" cy="457200"/>
           </a:xfrm>
           <a:prstGeom prst="rect">
             <a:avLst/>
@@ -4768,8 +4774,8 @@
         </p:nvSpPr>
         <p:spPr>
           <a:xfrm>
-            <a:off x="630936" y="2441448"/>
-            <a:ext cx="3398256" cy="420624"/>
+            <a:off x="594360" y="2331720"/>
+            <a:ext cx="3444240" cy="420624"/>
           </a:xfrm>
           <a:prstGeom prst="rect">
             <a:avLst/>
@@ -4818,8 +4824,8 @@
         </p:nvSpPr>
         <p:spPr>
           <a:xfrm>
-            <a:off x="905256" y="2862072"/>
-            <a:ext cx="3123936" cy="420624"/>
+            <a:off x="868680" y="2752344"/>
+            <a:ext cx="3169920" cy="420624"/>
           </a:xfrm>
           <a:prstGeom prst="rect">
             <a:avLst/>
@@ -4879,8 +4885,8 @@
         </p:nvSpPr>
         <p:spPr>
           <a:xfrm>
-            <a:off x="630936" y="3378708"/>
-            <a:ext cx="3398256" cy="420624"/>
+            <a:off x="594360" y="3323844"/>
+            <a:ext cx="3444240" cy="420624"/>
           </a:xfrm>
           <a:prstGeom prst="rect">
             <a:avLst/>
@@ -4929,8 +4935,8 @@
         </p:nvSpPr>
         <p:spPr>
           <a:xfrm>
-            <a:off x="905256" y="3799332"/>
-            <a:ext cx="3123936" cy="420624"/>
+            <a:off x="868680" y="3744468"/>
+            <a:ext cx="3169920" cy="420624"/>
           </a:xfrm>
           <a:prstGeom prst="rect">
             <a:avLst/>
@@ -4990,8 +4996,8 @@
         </p:nvSpPr>
         <p:spPr>
           <a:xfrm>
-            <a:off x="630936" y="4315968"/>
-            <a:ext cx="3398256" cy="420624"/>
+            <a:off x="594360" y="4315968"/>
+            <a:ext cx="3444240" cy="420624"/>
           </a:xfrm>
           <a:prstGeom prst="rect">
             <a:avLst/>
@@ -5029,8 +5035,8 @@
         </p:nvSpPr>
         <p:spPr>
           <a:xfrm>
-            <a:off x="905256" y="4736592"/>
-            <a:ext cx="3123936" cy="841248"/>
+            <a:off x="868680" y="4736592"/>
+            <a:ext cx="3169920" cy="841248"/>
           </a:xfrm>
           <a:prstGeom prst="rect">
             <a:avLst/>
@@ -5107,12 +5113,12 @@
         </p:nvSpPr>
         <p:spPr>
           <a:xfrm>
-            <a:off x="4376664" y="1691640"/>
-            <a:ext cx="3390758" cy="4032504"/>
+            <a:off x="4303776" y="1691640"/>
+            <a:ext cx="3581400" cy="4032504"/>
           </a:xfrm>
           <a:prstGeom prst="roundRect">
             <a:avLst>
-              <a:gd name="adj" fmla="val 2157"/>
+              <a:gd name="adj" fmla="val 2043"/>
             </a:avLst>
           </a:prstGeom>
           <a:solidFill>
@@ -5129,8 +5135,8 @@
         </p:nvSpPr>
         <p:spPr>
           <a:xfrm>
-            <a:off x="4504680" y="1837944"/>
-            <a:ext cx="3134726" cy="457200"/>
+            <a:off x="4395216" y="1783080"/>
+            <a:ext cx="3444240" cy="457200"/>
           </a:xfrm>
           <a:prstGeom prst="rect">
             <a:avLst/>
@@ -5168,8 +5174,8 @@
         </p:nvSpPr>
         <p:spPr>
           <a:xfrm>
-            <a:off x="4504680" y="2441448"/>
-            <a:ext cx="3134726" cy="420624"/>
+            <a:off x="4395216" y="2331720"/>
+            <a:ext cx="3444240" cy="420624"/>
           </a:xfrm>
           <a:prstGeom prst="rect">
             <a:avLst/>
@@ -5207,8 +5213,8 @@
         </p:nvSpPr>
         <p:spPr>
           <a:xfrm>
-            <a:off x="4779000" y="2862072"/>
-            <a:ext cx="2860406" cy="420624"/>
+            <a:off x="4669536" y="2752344"/>
+            <a:ext cx="3169920" cy="420624"/>
           </a:xfrm>
           <a:prstGeom prst="rect">
             <a:avLst/>
@@ -5246,8 +5252,8 @@
         </p:nvSpPr>
         <p:spPr>
           <a:xfrm>
-            <a:off x="4504680" y="3593592"/>
-            <a:ext cx="3134726" cy="420624"/>
+            <a:off x="4395216" y="3483864"/>
+            <a:ext cx="3444240" cy="420624"/>
           </a:xfrm>
           <a:prstGeom prst="rect">
             <a:avLst/>
@@ -5285,8 +5291,8 @@
         </p:nvSpPr>
         <p:spPr>
           <a:xfrm>
-            <a:off x="4779000" y="4014216"/>
-            <a:ext cx="2860406" cy="420624"/>
+            <a:off x="4669536" y="3904488"/>
+            <a:ext cx="3169920" cy="420624"/>
           </a:xfrm>
           <a:prstGeom prst="rect">
             <a:avLst/>
@@ -5335,8 +5341,8 @@
         </p:nvSpPr>
         <p:spPr>
           <a:xfrm>
-            <a:off x="4504680" y="4745736"/>
-            <a:ext cx="3134726" cy="420624"/>
+            <a:off x="4395216" y="4636008"/>
+            <a:ext cx="3444240" cy="420624"/>
           </a:xfrm>
           <a:prstGeom prst="rect">
             <a:avLst/>
@@ -5374,12 +5380,12 @@
         </p:nvSpPr>
         <p:spPr>
           <a:xfrm>
-            <a:off x="7986878" y="1691640"/>
-            <a:ext cx="3699154" cy="4032504"/>
+            <a:off x="8104632" y="1691640"/>
+            <a:ext cx="3581400" cy="4032504"/>
           </a:xfrm>
           <a:prstGeom prst="roundRect">
             <a:avLst>
-              <a:gd name="adj" fmla="val 1978"/>
+              <a:gd name="adj" fmla="val 2043"/>
             </a:avLst>
           </a:prstGeom>
           <a:solidFill>
@@ -5396,8 +5402,8 @@
         </p:nvSpPr>
         <p:spPr>
           <a:xfrm>
-            <a:off x="8114894" y="1837944"/>
-            <a:ext cx="3443122" cy="457200"/>
+            <a:off x="8196072" y="1783080"/>
+            <a:ext cx="3444240" cy="457200"/>
           </a:xfrm>
           <a:prstGeom prst="rect">
             <a:avLst/>
@@ -5435,8 +5441,8 @@
         </p:nvSpPr>
         <p:spPr>
           <a:xfrm>
-            <a:off x="8114894" y="2441448"/>
-            <a:ext cx="3443122" cy="420624"/>
+            <a:off x="8196072" y="2331720"/>
+            <a:ext cx="3444240" cy="420624"/>
           </a:xfrm>
           <a:prstGeom prst="rect">
             <a:avLst/>
@@ -5474,8 +5480,8 @@
         </p:nvSpPr>
         <p:spPr>
           <a:xfrm>
-            <a:off x="8114894" y="3172968"/>
-            <a:ext cx="3443122" cy="420624"/>
+            <a:off x="8196072" y="3063240"/>
+            <a:ext cx="3444240" cy="420624"/>
           </a:xfrm>
           <a:prstGeom prst="rect">
             <a:avLst/>
@@ -5513,8 +5519,8 @@
         </p:nvSpPr>
         <p:spPr>
           <a:xfrm>
-            <a:off x="8114894" y="3904488"/>
-            <a:ext cx="3443122" cy="420624"/>
+            <a:off x="8196072" y="3794760"/>
+            <a:ext cx="3444240" cy="420624"/>
           </a:xfrm>
           <a:prstGeom prst="rect">
             <a:avLst/>
@@ -5552,8 +5558,8 @@
         </p:nvSpPr>
         <p:spPr>
           <a:xfrm>
-            <a:off x="8114894" y="4636008"/>
-            <a:ext cx="3443122" cy="420624"/>
+            <a:off x="8196072" y="4526280"/>
+            <a:ext cx="3444240" cy="420624"/>
           </a:xfrm>
           <a:prstGeom prst="rect">
             <a:avLst/>
@@ -5591,8 +5597,8 @@
         </p:nvSpPr>
         <p:spPr>
           <a:xfrm>
-            <a:off x="8389214" y="5056632"/>
-            <a:ext cx="3168802" cy="420624"/>
+            <a:off x="8470392" y="4946904"/>
+            <a:ext cx="3169920" cy="420624"/>
           </a:xfrm>
           <a:prstGeom prst="rect">
             <a:avLst/>
@@ -6082,11 +6088,11 @@
         <p:spPr>
           <a:xfrm>
             <a:off x="502920" y="1691640"/>
-            <a:ext cx="3541827" cy="4032504"/>
+            <a:ext cx="3581400" cy="4032504"/>
           </a:xfrm>
           <a:prstGeom prst="roundRect">
             <a:avLst>
-              <a:gd name="adj" fmla="val 2065"/>
+              <a:gd name="adj" fmla="val 2043"/>
             </a:avLst>
           </a:prstGeom>
           <a:solidFill>
@@ -6103,8 +6109,8 @@
         </p:nvSpPr>
         <p:spPr>
           <a:xfrm>
-            <a:off x="630936" y="1837944"/>
-            <a:ext cx="3285795" cy="457200"/>
+            <a:off x="594360" y="1783080"/>
+            <a:ext cx="3444240" cy="457200"/>
           </a:xfrm>
           <a:prstGeom prst="rect">
             <a:avLst/>
@@ -6142,8 +6148,8 @@
         </p:nvSpPr>
         <p:spPr>
           <a:xfrm>
-            <a:off x="630936" y="2441448"/>
-            <a:ext cx="3285795" cy="420624"/>
+            <a:off x="594360" y="2331720"/>
+            <a:ext cx="3444240" cy="420624"/>
           </a:xfrm>
           <a:prstGeom prst="rect">
             <a:avLst/>
@@ -6203,8 +6209,8 @@
         </p:nvSpPr>
         <p:spPr>
           <a:xfrm>
-            <a:off x="905256" y="2862072"/>
-            <a:ext cx="3011475" cy="420624"/>
+            <a:off x="868680" y="2752344"/>
+            <a:ext cx="3169920" cy="420624"/>
           </a:xfrm>
           <a:prstGeom prst="rect">
             <a:avLst/>
@@ -6242,8 +6248,8 @@
         </p:nvSpPr>
         <p:spPr>
           <a:xfrm>
-            <a:off x="630936" y="3589020"/>
-            <a:ext cx="3285795" cy="420624"/>
+            <a:off x="594360" y="3483864"/>
+            <a:ext cx="3444240" cy="420624"/>
           </a:xfrm>
           <a:prstGeom prst="rect">
             <a:avLst/>
@@ -6268,6 +6274,17 @@
                 <a:cs typeface="メイリオ" pitchFamily="34" charset="-120"/>
               </a:rPr>
               <a:t>くも膜下：</a:t>
+            </a:r>
+            <a:r>
+              <a:rPr lang="ja-JP" altLang="en-US" sz="2200" b="1" dirty="0">
+                <a:solidFill>
+                  <a:srgbClr val="262626"/>
+                </a:solidFill>
+                <a:latin typeface="メイリオ" pitchFamily="34" charset="0"/>
+                <a:ea typeface="メイリオ" pitchFamily="34" charset="-122"/>
+                <a:cs typeface="メイリオ" pitchFamily="34" charset="-120"/>
+              </a:rPr>
+              <a:t>0.1〜0.2 mg</a:t>
             </a:r>
             <a:endParaRPr lang="ja-JP" sz="2200" dirty="0"/>
           </a:p>
@@ -6281,8 +6298,8 @@
         </p:nvSpPr>
         <p:spPr>
           <a:xfrm>
-            <a:off x="905256" y="4009644"/>
-            <a:ext cx="3011475" cy="420624"/>
+            <a:off x="594360" y="4215384"/>
+            <a:ext cx="3444240" cy="420624"/>
           </a:xfrm>
           <a:prstGeom prst="rect">
             <a:avLst/>
@@ -6298,7 +6315,7 @@
               <a:buNone/>
             </a:pPr>
             <a:r>
-              <a:rPr lang="ja-JP" altLang="en-US" sz="2200" b="1" dirty="0">
+              <a:rPr lang="ja-JP" altLang="en-US" sz="2200" dirty="0">
                 <a:solidFill>
                   <a:srgbClr val="262626"/>
                 </a:solidFill>
@@ -6306,7 +6323,7 @@
                 <a:ea typeface="メイリオ" pitchFamily="34" charset="-122"/>
                 <a:cs typeface="メイリオ" pitchFamily="34" charset="-120"/>
               </a:rPr>
-              <a:t>0.1〜0.2 mg</a:t>
+              <a:t>PCA の設定は</a:t>
             </a:r>
             <a:endParaRPr lang="ja-JP" sz="2200" dirty="0"/>
           </a:p>
@@ -6320,8 +6337,8 @@
         </p:nvSpPr>
         <p:spPr>
           <a:xfrm>
-            <a:off x="630936" y="4736592"/>
-            <a:ext cx="3285795" cy="420624"/>
+            <a:off x="868680" y="4636008"/>
+            <a:ext cx="3169920" cy="420624"/>
           </a:xfrm>
           <a:prstGeom prst="rect">
             <a:avLst/>
@@ -6345,7 +6362,7 @@
                 <a:ea typeface="メイリオ" pitchFamily="34" charset="-122"/>
                 <a:cs typeface="メイリオ" pitchFamily="34" charset="-120"/>
               </a:rPr>
-              <a:t>PCA の設定は</a:t>
+              <a:t>施設の方式</a:t>
             </a:r>
             <a:endParaRPr lang="ja-JP" sz="2200" dirty="0"/>
           </a:p>
@@ -6353,57 +6370,18 @@
       </p:sp>
       <p:sp>
         <p:nvSpPr>
-          <p:cNvPr id="18" name="Text 16"/>
-          <p:cNvSpPr txBox="1"/>
-          <p:nvPr/>
-        </p:nvSpPr>
-        <p:spPr>
-          <a:xfrm>
-            <a:off x="905256" y="5157216"/>
-            <a:ext cx="3011475" cy="420624"/>
-          </a:xfrm>
-          <a:prstGeom prst="rect">
-            <a:avLst/>
-          </a:prstGeom>
-          <a:noFill/>
-          <a:ln/>
-        </p:spPr>
-        <p:txBody>
-          <a:bodyPr wrap="square" lIns="0" tIns="0" rIns="0" bIns="0" rtlCol="0" anchor="t"/>
-          <a:lstStyle/>
-          <a:p>
-            <a:pPr algn="l" indent="0" marL="0">
-              <a:buNone/>
-            </a:pPr>
-            <a:r>
-              <a:rPr lang="ja-JP" altLang="en-US" sz="2200" dirty="0">
-                <a:solidFill>
-                  <a:srgbClr val="262626"/>
-                </a:solidFill>
-                <a:latin typeface="メイリオ" pitchFamily="34" charset="0"/>
-                <a:ea typeface="メイリオ" pitchFamily="34" charset="-122"/>
-                <a:cs typeface="メイリオ" pitchFamily="34" charset="-120"/>
-              </a:rPr>
-              <a:t>施設の方式</a:t>
-            </a:r>
-            <a:endParaRPr lang="ja-JP" sz="2200" dirty="0"/>
-          </a:p>
-        </p:txBody>
-      </p:sp>
-      <p:sp>
-        <p:nvSpPr>
-          <p:cNvPr id="19" name="Shape 17"/>
+          <p:cNvPr id="18" name="Shape 16"/>
           <p:cNvSpPr/>
           <p:nvPr/>
         </p:nvSpPr>
         <p:spPr>
           <a:xfrm>
-            <a:off x="4264203" y="1691640"/>
-            <a:ext cx="3541827" cy="4032504"/>
+            <a:off x="4303776" y="1691640"/>
+            <a:ext cx="3581400" cy="4032504"/>
           </a:xfrm>
           <a:prstGeom prst="roundRect">
             <a:avLst>
-              <a:gd name="adj" fmla="val 2065"/>
+              <a:gd name="adj" fmla="val 2043"/>
             </a:avLst>
           </a:prstGeom>
           <a:solidFill>
@@ -6414,14 +6392,53 @@
       </p:sp>
       <p:sp>
         <p:nvSpPr>
+          <p:cNvPr id="19" name="Text 17"/>
+          <p:cNvSpPr txBox="1"/>
+          <p:nvPr/>
+        </p:nvSpPr>
+        <p:spPr>
+          <a:xfrm>
+            <a:off x="4395216" y="1783080"/>
+            <a:ext cx="3444240" cy="457200"/>
+          </a:xfrm>
+          <a:prstGeom prst="rect">
+            <a:avLst/>
+          </a:prstGeom>
+          <a:noFill/>
+          <a:ln/>
+        </p:spPr>
+        <p:txBody>
+          <a:bodyPr wrap="square" lIns="0" tIns="0" rIns="0" bIns="0" rtlCol="0" anchor="t"/>
+          <a:lstStyle/>
+          <a:p>
+            <a:pPr algn="l" indent="0" marL="0">
+              <a:buNone/>
+            </a:pPr>
+            <a:r>
+              <a:rPr lang="ja-JP" altLang="en-US" sz="2400" b="1" dirty="0">
+                <a:solidFill>
+                  <a:srgbClr val="0072B2"/>
+                </a:solidFill>
+                <a:latin typeface="メイリオ" pitchFamily="34" charset="0"/>
+                <a:ea typeface="メイリオ" pitchFamily="34" charset="-122"/>
+                <a:cs typeface="メイリオ" pitchFamily="34" charset="-120"/>
+              </a:rPr>
+              <a:t>動態</a:t>
+            </a:r>
+            <a:endParaRPr lang="ja-JP" sz="2400" dirty="0"/>
+          </a:p>
+        </p:txBody>
+      </p:sp>
+      <p:sp>
+        <p:nvSpPr>
           <p:cNvPr id="20" name="Text 18"/>
           <p:cNvSpPr txBox="1"/>
           <p:nvPr/>
         </p:nvSpPr>
         <p:spPr>
           <a:xfrm>
-            <a:off x="4392219" y="1837944"/>
-            <a:ext cx="3285795" cy="457200"/>
+            <a:off x="4395216" y="2331720"/>
+            <a:ext cx="3444240" cy="420624"/>
           </a:xfrm>
           <a:prstGeom prst="rect">
             <a:avLst/>
@@ -6437,17 +6454,17 @@
               <a:buNone/>
             </a:pPr>
             <a:r>
-              <a:rPr lang="ja-JP" altLang="en-US" sz="2400" b="1" dirty="0">
-                <a:solidFill>
-                  <a:srgbClr val="0072B2"/>
-                </a:solidFill>
-                <a:latin typeface="メイリオ" pitchFamily="34" charset="0"/>
-                <a:ea typeface="メイリオ" pitchFamily="34" charset="-122"/>
-                <a:cs typeface="メイリオ" pitchFamily="34" charset="-120"/>
-              </a:rPr>
-              <a:t>動態</a:t>
-            </a:r>
-            <a:endParaRPr lang="ja-JP" sz="2400" dirty="0"/>
+              <a:rPr lang="ja-JP" altLang="en-US" sz="2200" dirty="0">
+                <a:solidFill>
+                  <a:srgbClr val="262626"/>
+                </a:solidFill>
+                <a:latin typeface="メイリオ" pitchFamily="34" charset="0"/>
+                <a:ea typeface="メイリオ" pitchFamily="34" charset="-122"/>
+                <a:cs typeface="メイリオ" pitchFamily="34" charset="-120"/>
+              </a:rPr>
+              <a:t>効果のピークが遅く</a:t>
+            </a:r>
+            <a:endParaRPr lang="ja-JP" sz="2200" dirty="0"/>
           </a:p>
         </p:txBody>
       </p:sp>
@@ -6459,8 +6476,8 @@
         </p:nvSpPr>
         <p:spPr>
           <a:xfrm>
-            <a:off x="4392219" y="2441448"/>
-            <a:ext cx="3285795" cy="420624"/>
+            <a:off x="4669536" y="2752344"/>
+            <a:ext cx="3169920" cy="420624"/>
           </a:xfrm>
           <a:prstGeom prst="rect">
             <a:avLst/>
@@ -6484,7 +6501,29 @@
                 <a:ea typeface="メイリオ" pitchFamily="34" charset="-122"/>
                 <a:cs typeface="メイリオ" pitchFamily="34" charset="-120"/>
               </a:rPr>
-              <a:t>効果のピークが遅く</a:t>
+              <a:t>（</a:t>
+            </a:r>
+            <a:r>
+              <a:rPr lang="ja-JP" altLang="en-US" sz="2200" b="1" dirty="0">
+                <a:solidFill>
+                  <a:srgbClr val="262626"/>
+                </a:solidFill>
+                <a:latin typeface="メイリオ" pitchFamily="34" charset="0"/>
+                <a:ea typeface="メイリオ" pitchFamily="34" charset="-122"/>
+                <a:cs typeface="メイリオ" pitchFamily="34" charset="-120"/>
+              </a:rPr>
+              <a:t>15〜30 分</a:t>
+            </a:r>
+            <a:r>
+              <a:rPr lang="ja-JP" altLang="en-US" sz="2200" dirty="0">
+                <a:solidFill>
+                  <a:srgbClr val="262626"/>
+                </a:solidFill>
+                <a:latin typeface="メイリオ" pitchFamily="34" charset="0"/>
+                <a:ea typeface="メイリオ" pitchFamily="34" charset="-122"/>
+                <a:cs typeface="メイリオ" pitchFamily="34" charset="-120"/>
+              </a:rPr>
+              <a:t>）、長い</a:t>
             </a:r>
             <a:endParaRPr lang="ja-JP" sz="2200" dirty="0"/>
           </a:p>
@@ -6498,8 +6537,8 @@
         </p:nvSpPr>
         <p:spPr>
           <a:xfrm>
-            <a:off x="4666539" y="2862072"/>
-            <a:ext cx="3011475" cy="420624"/>
+            <a:off x="4395216" y="3483864"/>
+            <a:ext cx="3444240" cy="420624"/>
           </a:xfrm>
           <a:prstGeom prst="rect">
             <a:avLst/>
@@ -6523,29 +6562,7 @@
                 <a:ea typeface="メイリオ" pitchFamily="34" charset="-122"/>
                 <a:cs typeface="メイリオ" pitchFamily="34" charset="-120"/>
               </a:rPr>
-              <a:t>（</a:t>
-            </a:r>
-            <a:r>
-              <a:rPr lang="ja-JP" altLang="en-US" sz="2200" b="1" dirty="0">
-                <a:solidFill>
-                  <a:srgbClr val="262626"/>
-                </a:solidFill>
-                <a:latin typeface="メイリオ" pitchFamily="34" charset="0"/>
-                <a:ea typeface="メイリオ" pitchFamily="34" charset="-122"/>
-                <a:cs typeface="メイリオ" pitchFamily="34" charset="-120"/>
-              </a:rPr>
-              <a:t>15〜30 分</a:t>
-            </a:r>
-            <a:r>
-              <a:rPr lang="ja-JP" altLang="en-US" sz="2200" dirty="0">
-                <a:solidFill>
-                  <a:srgbClr val="262626"/>
-                </a:solidFill>
-                <a:latin typeface="メイリオ" pitchFamily="34" charset="0"/>
-                <a:ea typeface="メイリオ" pitchFamily="34" charset="-122"/>
-                <a:cs typeface="メイリオ" pitchFamily="34" charset="-120"/>
-              </a:rPr>
-              <a:t>）、長い</a:t>
+              <a:t>肝代謝、</a:t>
             </a:r>
             <a:endParaRPr lang="ja-JP" sz="2200" dirty="0"/>
           </a:p>
@@ -6559,8 +6576,8 @@
         </p:nvSpPr>
         <p:spPr>
           <a:xfrm>
-            <a:off x="4392219" y="3593592"/>
-            <a:ext cx="3285795" cy="420624"/>
+            <a:off x="4669536" y="3904488"/>
+            <a:ext cx="3169920" cy="420624"/>
           </a:xfrm>
           <a:prstGeom prst="rect">
             <a:avLst/>
@@ -6584,7 +6601,7 @@
                 <a:ea typeface="メイリオ" pitchFamily="34" charset="-122"/>
                 <a:cs typeface="メイリオ" pitchFamily="34" charset="-120"/>
               </a:rPr>
-              <a:t>肝代謝、</a:t>
+              <a:t>代謝物は腎排泄</a:t>
             </a:r>
             <a:endParaRPr lang="ja-JP" sz="2200" dirty="0"/>
           </a:p>
@@ -6598,8 +6615,8 @@
         </p:nvSpPr>
         <p:spPr>
           <a:xfrm>
-            <a:off x="4666539" y="4014216"/>
-            <a:ext cx="3011475" cy="420624"/>
+            <a:off x="4395216" y="4636008"/>
+            <a:ext cx="3444240" cy="420624"/>
           </a:xfrm>
           <a:prstGeom prst="rect">
             <a:avLst/>
@@ -6623,7 +6640,7 @@
                 <a:ea typeface="メイリオ" pitchFamily="34" charset="-122"/>
                 <a:cs typeface="メイリオ" pitchFamily="34" charset="-120"/>
               </a:rPr>
-              <a:t>代謝物は腎排泄</a:t>
+              <a:t>腎不全で蓄積（M6G）</a:t>
             </a:r>
             <a:endParaRPr lang="ja-JP" sz="2200" dirty="0"/>
           </a:p>
@@ -6631,57 +6648,18 @@
       </p:sp>
       <p:sp>
         <p:nvSpPr>
-          <p:cNvPr id="25" name="Text 23"/>
-          <p:cNvSpPr txBox="1"/>
-          <p:nvPr/>
-        </p:nvSpPr>
-        <p:spPr>
-          <a:xfrm>
-            <a:off x="4392219" y="4745736"/>
-            <a:ext cx="3285795" cy="420624"/>
-          </a:xfrm>
-          <a:prstGeom prst="rect">
-            <a:avLst/>
-          </a:prstGeom>
-          <a:noFill/>
-          <a:ln/>
-        </p:spPr>
-        <p:txBody>
-          <a:bodyPr wrap="square" lIns="0" tIns="0" rIns="0" bIns="0" rtlCol="0" anchor="t"/>
-          <a:lstStyle/>
-          <a:p>
-            <a:pPr algn="l" indent="0" marL="0">
-              <a:buNone/>
-            </a:pPr>
-            <a:r>
-              <a:rPr lang="ja-JP" altLang="en-US" sz="2200" dirty="0">
-                <a:solidFill>
-                  <a:srgbClr val="262626"/>
-                </a:solidFill>
-                <a:latin typeface="メイリオ" pitchFamily="34" charset="0"/>
-                <a:ea typeface="メイリオ" pitchFamily="34" charset="-122"/>
-                <a:cs typeface="メイリオ" pitchFamily="34" charset="-120"/>
-              </a:rPr>
-              <a:t>腎不全で蓄積（M6G）</a:t>
-            </a:r>
-            <a:endParaRPr lang="ja-JP" sz="2200" dirty="0"/>
-          </a:p>
-        </p:txBody>
-      </p:sp>
-      <p:sp>
-        <p:nvSpPr>
-          <p:cNvPr id="26" name="Shape 24"/>
+          <p:cNvPr id="25" name="Shape 23"/>
           <p:cNvSpPr/>
           <p:nvPr/>
         </p:nvSpPr>
         <p:spPr>
           <a:xfrm>
-            <a:off x="8025486" y="1691640"/>
-            <a:ext cx="3660546" cy="4032504"/>
+            <a:off x="8104632" y="1691640"/>
+            <a:ext cx="3581400" cy="4032504"/>
           </a:xfrm>
           <a:prstGeom prst="roundRect">
             <a:avLst>
-              <a:gd name="adj" fmla="val 1998"/>
+              <a:gd name="adj" fmla="val 2043"/>
             </a:avLst>
           </a:prstGeom>
           <a:solidFill>
@@ -6692,14 +6670,53 @@
       </p:sp>
       <p:sp>
         <p:nvSpPr>
+          <p:cNvPr id="26" name="Text 24"/>
+          <p:cNvSpPr txBox="1"/>
+          <p:nvPr/>
+        </p:nvSpPr>
+        <p:spPr>
+          <a:xfrm>
+            <a:off x="8196072" y="1783080"/>
+            <a:ext cx="3444240" cy="457200"/>
+          </a:xfrm>
+          <a:prstGeom prst="rect">
+            <a:avLst/>
+          </a:prstGeom>
+          <a:noFill/>
+          <a:ln/>
+        </p:spPr>
+        <p:txBody>
+          <a:bodyPr wrap="square" lIns="0" tIns="0" rIns="0" bIns="0" rtlCol="0" anchor="t"/>
+          <a:lstStyle/>
+          <a:p>
+            <a:pPr algn="l" indent="0" marL="0">
+              <a:buNone/>
+            </a:pPr>
+            <a:r>
+              <a:rPr lang="ja-JP" altLang="en-US" sz="2400" b="1" dirty="0">
+                <a:solidFill>
+                  <a:srgbClr val="D55E00"/>
+                </a:solidFill>
+                <a:latin typeface="メイリオ" pitchFamily="34" charset="0"/>
+                <a:ea typeface="メイリオ" pitchFamily="34" charset="-122"/>
+                <a:cs typeface="メイリオ" pitchFamily="34" charset="-120"/>
+              </a:rPr>
+              <a:t>注意</a:t>
+            </a:r>
+            <a:endParaRPr lang="ja-JP" sz="2400" dirty="0"/>
+          </a:p>
+        </p:txBody>
+      </p:sp>
+      <p:sp>
+        <p:nvSpPr>
           <p:cNvPr id="27" name="Text 25"/>
           <p:cNvSpPr txBox="1"/>
           <p:nvPr/>
         </p:nvSpPr>
         <p:spPr>
           <a:xfrm>
-            <a:off x="8153502" y="1837944"/>
-            <a:ext cx="3404514" cy="457200"/>
+            <a:off x="8196072" y="2331720"/>
+            <a:ext cx="3444240" cy="420624"/>
           </a:xfrm>
           <a:prstGeom prst="rect">
             <a:avLst/>
@@ -6715,17 +6732,17 @@
               <a:buNone/>
             </a:pPr>
             <a:r>
-              <a:rPr lang="ja-JP" altLang="en-US" sz="2400" b="1" dirty="0">
-                <a:solidFill>
-                  <a:srgbClr val="D55E00"/>
-                </a:solidFill>
-                <a:latin typeface="メイリオ" pitchFamily="34" charset="0"/>
-                <a:ea typeface="メイリオ" pitchFamily="34" charset="-122"/>
-                <a:cs typeface="メイリオ" pitchFamily="34" charset="-120"/>
-              </a:rPr>
-              <a:t>注意</a:t>
-            </a:r>
-            <a:endParaRPr lang="ja-JP" sz="2400" dirty="0"/>
+              <a:rPr lang="ja-JP" altLang="en-US" sz="2200" dirty="0">
+                <a:solidFill>
+                  <a:srgbClr val="262626"/>
+                </a:solidFill>
+                <a:latin typeface="メイリオ" pitchFamily="34" charset="0"/>
+                <a:ea typeface="メイリオ" pitchFamily="34" charset="-122"/>
+                <a:cs typeface="メイリオ" pitchFamily="34" charset="-120"/>
+              </a:rPr>
+              <a:t>ヒスタミン遊離</a:t>
+            </a:r>
+            <a:endParaRPr lang="ja-JP" sz="2200" dirty="0"/>
           </a:p>
         </p:txBody>
       </p:sp>
@@ -6737,8 +6754,8 @@
         </p:nvSpPr>
         <p:spPr>
           <a:xfrm>
-            <a:off x="8153502" y="2441448"/>
-            <a:ext cx="3404514" cy="420624"/>
+            <a:off x="8470392" y="2752344"/>
+            <a:ext cx="3169920" cy="420624"/>
           </a:xfrm>
           <a:prstGeom prst="rect">
             <a:avLst/>
@@ -6762,7 +6779,7 @@
                 <a:ea typeface="メイリオ" pitchFamily="34" charset="-122"/>
                 <a:cs typeface="メイリオ" pitchFamily="34" charset="-120"/>
               </a:rPr>
-              <a:t>ヒスタミン遊離</a:t>
+              <a:t>（血管拡張・低血圧）</a:t>
             </a:r>
             <a:endParaRPr lang="ja-JP" sz="2200" dirty="0"/>
           </a:p>
@@ -6776,8 +6793,8 @@
         </p:nvSpPr>
         <p:spPr>
           <a:xfrm>
-            <a:off x="8427822" y="2862072"/>
-            <a:ext cx="3130194" cy="420624"/>
+            <a:off x="8196072" y="3483864"/>
+            <a:ext cx="3444240" cy="420624"/>
           </a:xfrm>
           <a:prstGeom prst="rect">
             <a:avLst/>
@@ -6801,7 +6818,7 @@
                 <a:ea typeface="メイリオ" pitchFamily="34" charset="-122"/>
                 <a:cs typeface="メイリオ" pitchFamily="34" charset="-120"/>
               </a:rPr>
-              <a:t>（血管拡張・低血圧）</a:t>
+              <a:t>くも膜下投与後の</a:t>
             </a:r>
             <a:endParaRPr lang="ja-JP" sz="2200" dirty="0"/>
           </a:p>
@@ -6815,8 +6832,8 @@
         </p:nvSpPr>
         <p:spPr>
           <a:xfrm>
-            <a:off x="8153502" y="3593592"/>
-            <a:ext cx="3404514" cy="420624"/>
+            <a:off x="8470392" y="3904488"/>
+            <a:ext cx="3169920" cy="420624"/>
           </a:xfrm>
           <a:prstGeom prst="rect">
             <a:avLst/>
@@ -6840,7 +6857,7 @@
                 <a:ea typeface="メイリオ" pitchFamily="34" charset="-122"/>
                 <a:cs typeface="メイリオ" pitchFamily="34" charset="-120"/>
               </a:rPr>
-              <a:t>くも膜下投与後の</a:t>
+              <a:t>遅発性呼吸抑制</a:t>
             </a:r>
             <a:endParaRPr lang="ja-JP" sz="2200" dirty="0"/>
           </a:p>
@@ -6854,47 +6871,8 @@
         </p:nvSpPr>
         <p:spPr>
           <a:xfrm>
-            <a:off x="8427822" y="4014216"/>
-            <a:ext cx="3130194" cy="420624"/>
-          </a:xfrm>
-          <a:prstGeom prst="rect">
-            <a:avLst/>
-          </a:prstGeom>
-          <a:noFill/>
-          <a:ln/>
-        </p:spPr>
-        <p:txBody>
-          <a:bodyPr wrap="square" lIns="0" tIns="0" rIns="0" bIns="0" rtlCol="0" anchor="t"/>
-          <a:lstStyle/>
-          <a:p>
-            <a:pPr algn="l" indent="0" marL="0">
-              <a:buNone/>
-            </a:pPr>
-            <a:r>
-              <a:rPr lang="ja-JP" altLang="en-US" sz="2200" dirty="0">
-                <a:solidFill>
-                  <a:srgbClr val="262626"/>
-                </a:solidFill>
-                <a:latin typeface="メイリオ" pitchFamily="34" charset="0"/>
-                <a:ea typeface="メイリオ" pitchFamily="34" charset="-122"/>
-                <a:cs typeface="メイリオ" pitchFamily="34" charset="-120"/>
-              </a:rPr>
-              <a:t>遅発性呼吸抑制</a:t>
-            </a:r>
-            <a:endParaRPr lang="ja-JP" sz="2200" dirty="0"/>
-          </a:p>
-        </p:txBody>
-      </p:sp>
-      <p:sp>
-        <p:nvSpPr>
-          <p:cNvPr id="32" name="Text 30"/>
-          <p:cNvSpPr txBox="1"/>
-          <p:nvPr/>
-        </p:nvSpPr>
-        <p:spPr>
-          <a:xfrm>
-            <a:off x="8153502" y="4745736"/>
-            <a:ext cx="3404514" cy="420624"/>
+            <a:off x="8196072" y="4636008"/>
+            <a:ext cx="3444240" cy="420624"/>
           </a:xfrm>
           <a:prstGeom prst="rect">
             <a:avLst/>
@@ -7390,13 +7368,13 @@
                 <a:gridCol w="2651760"/>
                 <a:gridCol w="8531352"/>
               </a:tblGrid>
-              <a:tr h="508406">
+              <a:tr h="512064">
                 <a:tc>
                   <a:txBody>
                     <a:bodyPr/>
                     <a:lstStyle/>
                     <a:p>
-                      <a:pPr algn="ctr" indent="0" marL="0">
+                      <a:pPr algn="l" indent="0" marL="0">
                         <a:buNone/>
                       </a:pPr>
                       <a:r>
@@ -7417,7 +7395,7 @@
                       </a:endParaRPr>
                     </a:p>
                   </a:txBody>
-                  <a:tcPr marL="127000" marR="127000" marT="25400" marB="25400" anchor="ctr">
+                  <a:tcPr marL="127000" marR="127000" marT="12700" marB="12700" anchor="ctr">
                     <a:lnL w="12700" cap="flat" cmpd="sng" algn="ctr">
                       <a:solidFill>
                         <a:srgbClr val="BFBFBF"/>
@@ -7464,7 +7442,7 @@
                     <a:bodyPr/>
                     <a:lstStyle/>
                     <a:p>
-                      <a:pPr algn="ctr" indent="0" marL="0">
+                      <a:pPr algn="l" indent="0" marL="0">
                         <a:buNone/>
                       </a:pPr>
                       <a:r>
@@ -7485,7 +7463,7 @@
                       </a:endParaRPr>
                     </a:p>
                   </a:txBody>
-                  <a:tcPr marL="127000" marR="127000" marT="25400" marB="25400" anchor="ctr">
+                  <a:tcPr marL="127000" marR="127000" marT="12700" marB="12700" anchor="ctr">
                     <a:lnL w="12700" cap="flat" cmpd="sng" algn="ctr">
                       <a:solidFill>
                         <a:srgbClr val="BFBFBF"/>
@@ -7528,7 +7506,7 @@
                   </a:tcPr>
                 </a:tc>
               </a:tr>
-              <a:tr h="969264">
+              <a:tr h="950976">
                 <a:tc>
                   <a:txBody>
                     <a:bodyPr/>
@@ -7555,7 +7533,7 @@
                       </a:endParaRPr>
                     </a:p>
                   </a:txBody>
-                  <a:tcPr marL="127000" marR="127000" marT="25400" marB="25400" anchor="ctr">
+                  <a:tcPr marL="127000" marR="127000" marT="12700" marB="12700" anchor="ctr">
                     <a:lnL w="12700" cap="flat" cmpd="sng" algn="ctr">
                       <a:solidFill>
                         <a:srgbClr val="BFBFBF"/>
@@ -7644,7 +7622,7 @@
                       </a:endParaRPr>
                     </a:p>
                   </a:txBody>
-                  <a:tcPr marL="127000" marR="127000" marT="25400" marB="25400" anchor="ctr">
+                  <a:tcPr marL="127000" marR="127000" marT="12700" marB="12700" anchor="ctr">
                     <a:lnL w="12700" cap="flat" cmpd="sng" algn="ctr">
                       <a:solidFill>
                         <a:srgbClr val="BFBFBF"/>
@@ -7684,7 +7662,7 @@
                   </a:tcPr>
                 </a:tc>
               </a:tr>
-              <a:tr h="508406">
+              <a:tr h="512064">
                 <a:tc>
                   <a:txBody>
                     <a:bodyPr/>
@@ -7711,7 +7689,7 @@
                       </a:endParaRPr>
                     </a:p>
                   </a:txBody>
-                  <a:tcPr marL="127000" marR="127000" marT="25400" marB="25400" anchor="ctr">
+                  <a:tcPr marL="127000" marR="127000" marT="12700" marB="12700" anchor="ctr">
                     <a:lnL w="12700" cap="flat" cmpd="sng" algn="ctr">
                       <a:solidFill>
                         <a:srgbClr val="BFBFBF"/>
@@ -7779,7 +7757,7 @@
                       </a:endParaRPr>
                     </a:p>
                   </a:txBody>
-                  <a:tcPr marL="127000" marR="127000" marT="25400" marB="25400" anchor="ctr">
+                  <a:tcPr marL="127000" marR="127000" marT="12700" marB="12700" anchor="ctr">
                     <a:lnL w="12700" cap="flat" cmpd="sng" algn="ctr">
                       <a:solidFill>
                         <a:srgbClr val="BFBFBF"/>
@@ -7819,7 +7797,7 @@
                   </a:tcPr>
                 </a:tc>
               </a:tr>
-              <a:tr h="508406">
+              <a:tr h="512064">
                 <a:tc>
                   <a:txBody>
                     <a:bodyPr/>
@@ -7846,7 +7824,7 @@
                       </a:endParaRPr>
                     </a:p>
                   </a:txBody>
-                  <a:tcPr marL="127000" marR="127000" marT="25400" marB="25400" anchor="ctr">
+                  <a:tcPr marL="127000" marR="127000" marT="12700" marB="12700" anchor="ctr">
                     <a:lnL w="12700" cap="flat" cmpd="sng" algn="ctr">
                       <a:solidFill>
                         <a:srgbClr val="BFBFBF"/>
@@ -7914,7 +7892,7 @@
                       </a:endParaRPr>
                     </a:p>
                   </a:txBody>
-                  <a:tcPr marL="127000" marR="127000" marT="25400" marB="25400" anchor="ctr">
+                  <a:tcPr marL="127000" marR="127000" marT="12700" marB="12700" anchor="ctr">
                     <a:lnL w="12700" cap="flat" cmpd="sng" algn="ctr">
                       <a:solidFill>
                         <a:srgbClr val="BFBFBF"/>
@@ -7954,7 +7932,7 @@
                   </a:tcPr>
                 </a:tc>
               </a:tr>
-              <a:tr h="508406">
+              <a:tr h="512064">
                 <a:tc>
                   <a:txBody>
                     <a:bodyPr/>
@@ -7981,7 +7959,7 @@
                       </a:endParaRPr>
                     </a:p>
                   </a:txBody>
-                  <a:tcPr marL="127000" marR="127000" marT="25400" marB="25400" anchor="ctr">
+                  <a:tcPr marL="127000" marR="127000" marT="12700" marB="12700" anchor="ctr">
                     <a:lnL w="12700" cap="flat" cmpd="sng" algn="ctr">
                       <a:solidFill>
                         <a:srgbClr val="BFBFBF"/>
@@ -8049,7 +8027,7 @@
                       </a:endParaRPr>
                     </a:p>
                   </a:txBody>
-                  <a:tcPr marL="127000" marR="127000" marT="25400" marB="25400" anchor="ctr">
+                  <a:tcPr marL="127000" marR="127000" marT="12700" marB="12700" anchor="ctr">
                     <a:lnL w="12700" cap="flat" cmpd="sng" algn="ctr">
                       <a:solidFill>
                         <a:srgbClr val="BFBFBF"/>
@@ -8089,7 +8067,7 @@
                   </a:tcPr>
                 </a:tc>
               </a:tr>
-              <a:tr h="508406">
+              <a:tr h="512064">
                 <a:tc>
                   <a:txBody>
                     <a:bodyPr/>
@@ -8116,7 +8094,7 @@
                       </a:endParaRPr>
                     </a:p>
                   </a:txBody>
-                  <a:tcPr marL="127000" marR="127000" marT="25400" marB="25400" anchor="ctr">
+                  <a:tcPr marL="127000" marR="127000" marT="12700" marB="12700" anchor="ctr">
                     <a:lnL w="12700" cap="flat" cmpd="sng" algn="ctr">
                       <a:solidFill>
                         <a:srgbClr val="BFBFBF"/>
@@ -8184,7 +8162,7 @@
                       </a:endParaRPr>
                     </a:p>
                   </a:txBody>
-                  <a:tcPr marL="127000" marR="127000" marT="25400" marB="25400" anchor="ctr">
+                  <a:tcPr marL="127000" marR="127000" marT="12700" marB="12700" anchor="ctr">
                     <a:lnL w="12700" cap="flat" cmpd="sng" algn="ctr">
                       <a:solidFill>
                         <a:srgbClr val="BFBFBF"/>
@@ -8224,7 +8202,7 @@
                   </a:tcPr>
                 </a:tc>
               </a:tr>
-              <a:tr h="508406">
+              <a:tr h="512064">
                 <a:tc>
                   <a:txBody>
                     <a:bodyPr/>
@@ -8251,7 +8229,7 @@
                       </a:endParaRPr>
                     </a:p>
                   </a:txBody>
-                  <a:tcPr marL="127000" marR="127000" marT="25400" marB="25400" anchor="ctr">
+                  <a:tcPr marL="127000" marR="127000" marT="12700" marB="12700" anchor="ctr">
                     <a:lnL w="12700" cap="flat" cmpd="sng" algn="ctr">
                       <a:solidFill>
                         <a:srgbClr val="BFBFBF"/>
@@ -8319,7 +8297,7 @@
                       </a:endParaRPr>
                     </a:p>
                   </a:txBody>
-                  <a:tcPr marL="127000" marR="127000" marT="25400" marB="25400" anchor="ctr">
+                  <a:tcPr marL="127000" marR="127000" marT="12700" marB="12700" anchor="ctr">
                     <a:lnL w="12700" cap="flat" cmpd="sng" algn="ctr">
                       <a:solidFill>
                         <a:srgbClr val="BFBFBF"/>
@@ -8951,7 +8929,7 @@
           </a:solidFill>
           <a:ln w="31750">
             <a:solidFill>
-              <a:srgbClr val="00A8AA"/>
+              <a:srgbClr val="C00000"/>
             </a:solidFill>
           </a:ln>
         </p:spPr>
@@ -9419,8 +9397,8 @@
         </p:nvSpPr>
         <p:spPr>
           <a:xfrm>
-            <a:off x="502920" y="1783080"/>
-            <a:ext cx="11155680" cy="4069080"/>
+            <a:off x="502920" y="1691640"/>
+            <a:ext cx="11155680" cy="4352544"/>
           </a:xfrm>
           <a:prstGeom prst="rect">
             <a:avLst/>
@@ -9429,12 +9407,12 @@
           <a:ln/>
         </p:spPr>
         <p:txBody>
-          <a:bodyPr wrap="square" lIns="0" tIns="0" rIns="0" bIns="0" rtlCol="0" anchor="t"/>
+          <a:bodyPr wrap="square" lIns="0" tIns="0" rIns="0" bIns="0" rtlCol="0" anchor="ctr"/>
           <a:lstStyle/>
           <a:p>
             <a:pPr algn="l" marL="406400" indent="-406400">
               <a:spcAft>
-                <a:spcPts val="2600"/>
+                <a:spcPts val="2800"/>
               </a:spcAft>
               <a:buSzPct val="100000"/>
               <a:buChar char="•"/>
@@ -9455,7 +9433,7 @@
           <a:p>
             <a:pPr algn="l" marL="406400" indent="-406400">
               <a:spcAft>
-                <a:spcPts val="2600"/>
+                <a:spcPts val="2800"/>
               </a:spcAft>
               <a:buSzPct val="100000"/>
               <a:buChar char="•"/>
@@ -9476,7 +9454,7 @@
           <a:p>
             <a:pPr algn="l" marL="406400" indent="-406400">
               <a:spcAft>
-                <a:spcPts val="2600"/>
+                <a:spcPts val="2800"/>
               </a:spcAft>
               <a:buSzPct val="100000"/>
               <a:buChar char="•"/>
@@ -9497,7 +9475,7 @@
           <a:p>
             <a:pPr algn="l" marL="406400" indent="-406400">
               <a:spcAft>
-                <a:spcPts val="2600"/>
+                <a:spcPts val="2800"/>
               </a:spcAft>
               <a:buSzPct val="100000"/>
               <a:buChar char="•"/>
@@ -9518,7 +9496,7 @@
           <a:p>
             <a:pPr algn="l" marL="406400" indent="-406400">
               <a:spcAft>
-                <a:spcPts val="2600"/>
+                <a:spcPts val="2800"/>
               </a:spcAft>
               <a:buSzPct val="100000"/>
               <a:buChar char="•"/>
@@ -9986,8 +9964,8 @@
         </p:nvSpPr>
         <p:spPr>
           <a:xfrm>
-            <a:off x="502920" y="1783080"/>
-            <a:ext cx="11155680" cy="3685032"/>
+            <a:off x="502920" y="1691640"/>
+            <a:ext cx="11155680" cy="4032504"/>
           </a:xfrm>
           <a:prstGeom prst="rect">
             <a:avLst/>
@@ -9996,12 +9974,12 @@
           <a:ln/>
         </p:spPr>
         <p:txBody>
-          <a:bodyPr wrap="square" lIns="0" tIns="0" rIns="0" bIns="0" rtlCol="0" anchor="t"/>
+          <a:bodyPr wrap="square" lIns="0" tIns="0" rIns="0" bIns="0" rtlCol="0" anchor="ctr"/>
           <a:lstStyle/>
           <a:p>
             <a:pPr algn="l" marL="406400" indent="-406400">
               <a:spcAft>
-                <a:spcPts val="2000"/>
+                <a:spcPts val="2400"/>
               </a:spcAft>
               <a:buSzPct val="100000"/>
               <a:buChar char="•"/>
@@ -10022,7 +10000,7 @@
           <a:p>
             <a:pPr algn="l" marL="406400" indent="-406400">
               <a:spcAft>
-                <a:spcPts val="2000"/>
+                <a:spcPts val="2400"/>
               </a:spcAft>
               <a:buSzPct val="100000"/>
               <a:buChar char="•"/>
@@ -10054,7 +10032,7 @@
           <a:p>
             <a:pPr algn="l" marL="406400" indent="-406400">
               <a:spcAft>
-                <a:spcPts val="2000"/>
+                <a:spcPts val="2400"/>
               </a:spcAft>
               <a:buSzPct val="100000"/>
               <a:buChar char="•"/>
@@ -10086,7 +10064,7 @@
           <a:p>
             <a:pPr algn="l" marL="406400" indent="-406400">
               <a:spcAft>
-                <a:spcPts val="2000"/>
+                <a:spcPts val="2400"/>
               </a:spcAft>
               <a:buSzPct val="100000"/>
               <a:buChar char="•"/>
@@ -10118,7 +10096,7 @@
           <a:p>
             <a:pPr algn="l" marL="406400" indent="-406400">
               <a:spcAft>
-                <a:spcPts val="2000"/>
+                <a:spcPts val="2400"/>
               </a:spcAft>
               <a:buSzPct val="100000"/>
               <a:buChar char="•"/>
